--- a/cours/Module TIC/Département Français/ENS 2ème année/Cours_TIC_ENS_2eme_annee_FR.pptx
+++ b/cours/Module TIC/Département Français/ENS 2ème année/Cours_TIC_ENS_2eme_annee_FR.pptx
@@ -15,8 +15,13 @@
     <p:sldId id="263" r:id="rId14"/>
     <p:sldId id="264" r:id="rId15"/>
     <p:sldId id="265" r:id="rId16"/>
+    <p:sldId id="266" r:id="rId17"/>
+    <p:sldId id="267" r:id="rId18"/>
+    <p:sldId id="268" r:id="rId19"/>
+    <p:sldId id="269" r:id="rId20"/>
+    <p:sldId id="270" r:id="rId21"/>
   </p:sldIdLst>
-  <p:sldSz cx="12191695" cy="6858000" type="screen4x3"/>
+  <p:sldSz cx="9144000" cy="6858000" type="screen4x3"/>
   <p:notesSz cx="6858000" cy="9144000"/>
   <p:defaultTextStyle>
     <a:defPPr>
@@ -3090,6 +3095,14 @@
 <file path=ppt/slides/slide1.xml><?xml version="1.0" encoding="utf-8"?>
 <p:sld xmlns:a="http://schemas.openxmlformats.org/drawingml/2006/main" xmlns:p="http://schemas.openxmlformats.org/presentationml/2006/main" xmlns:r="http://schemas.openxmlformats.org/officeDocument/2006/relationships">
   <p:cSld>
+    <p:bg>
+      <p:bgPr>
+        <a:solidFill>
+          <a:srgbClr val="1A5C33"/>
+        </a:solidFill>
+        <a:effectLst/>
+      </p:bgPr>
+    </p:bg>
     <p:spTree>
       <p:nvGrpSpPr>
         <p:cNvPr id="1" name=""/>
@@ -3099,56 +3112,14 @@
       <p:grpSpPr/>
       <p:sp>
         <p:nvSpPr>
-          <p:cNvPr id="2" name="Title 1"/>
-          <p:cNvSpPr>
-            <a:spLocks noGrp="1"/>
-          </p:cNvSpPr>
-          <p:nvPr>
-            <p:ph type="ctrTitle"/>
-          </p:nvPr>
-        </p:nvSpPr>
-        <p:spPr/>
-        <p:txBody>
-          <a:bodyPr/>
-          <a:lstStyle/>
-          <a:p>
-            <a:r>
-              <a:t>TIC — ENS 2ème année</a:t>
-            </a:r>
-          </a:p>
-        </p:txBody>
-      </p:sp>
-      <p:sp>
-        <p:nvSpPr>
-          <p:cNvPr id="3" name="Subtitle 2"/>
-          <p:cNvSpPr>
-            <a:spLocks noGrp="1"/>
-          </p:cNvSpPr>
-          <p:nvPr>
-            <p:ph type="subTitle" idx="1"/>
-          </p:nvPr>
-        </p:nvSpPr>
-        <p:spPr/>
-        <p:txBody>
-          <a:bodyPr/>
-          <a:lstStyle/>
-          <a:p>
-            <a:r>
-              <a:t>Séquences et stage | 1h30 | BELACEL Madani</a:t>
-            </a:r>
-          </a:p>
-        </p:txBody>
-      </p:sp>
-      <p:sp>
-        <p:nvSpPr>
-          <p:cNvPr id="4" name="TextBox 3"/>
+          <p:cNvPr id="2" name="TextBox 1"/>
           <p:cNvSpPr txBox="1"/>
           <p:nvPr/>
         </p:nvSpPr>
         <p:spPr>
           <a:xfrm>
-            <a:off x="365760" y="6446520"/>
-            <a:ext cx="8412480" cy="320040"/>
+            <a:off x="731520" y="1371600"/>
+            <a:ext cx="7680960" cy="1371600"/>
           </a:xfrm>
           <a:prstGeom prst="rect">
             <a:avLst/>
@@ -3156,20 +3127,90 @@
           <a:noFill/>
         </p:spPr>
         <p:txBody>
-          <a:bodyPr wrap="none">
+          <a:bodyPr wrap="square">
             <a:spAutoFit/>
           </a:bodyPr>
           <a:lstStyle/>
           <a:p>
             <a:pPr algn="ctr">
-              <a:defRPr sz="900">
-                <a:solidFill>
-                  <a:srgbClr val="404040"/>
-                </a:solidFill>
-              </a:defRPr>
-            </a:pPr>
-            <a:r>
-              <a:t>TIC — ENS 2ème année — Module Langues  •  Diapositive 1/10</a:t>
+              <a:defRPr sz="3200" b="1">
+                <a:solidFill>
+                  <a:srgbClr val="FFFFFF"/>
+                </a:solidFill>
+              </a:defRPr>
+            </a:pPr>
+            <a:r>
+              <a:t>Cours TIC 01 — Introduction aux TIC (ENS)</a:t>
+            </a:r>
+          </a:p>
+        </p:txBody>
+      </p:sp>
+      <p:sp>
+        <p:nvSpPr>
+          <p:cNvPr id="3" name="TextBox 2"/>
+          <p:cNvSpPr txBox="1"/>
+          <p:nvPr/>
+        </p:nvSpPr>
+        <p:spPr>
+          <a:xfrm>
+            <a:off x="731520" y="2926080"/>
+            <a:ext cx="7680960" cy="548640"/>
+          </a:xfrm>
+          <a:prstGeom prst="rect">
+            <a:avLst/>
+          </a:prstGeom>
+          <a:noFill/>
+        </p:spPr>
+        <p:txBody>
+          <a:bodyPr wrap="square">
+            <a:spAutoFit/>
+          </a:bodyPr>
+          <a:lstStyle/>
+          <a:p>
+            <a:pPr algn="ctr">
+              <a:defRPr sz="2000" b="0">
+                <a:solidFill>
+                  <a:srgbClr val="C5D9C7"/>
+                </a:solidFill>
+              </a:defRPr>
+            </a:pPr>
+            <a:r>
+              <a:t>Module TIC — Dr. BELACEL Madani</a:t>
+            </a:r>
+          </a:p>
+        </p:txBody>
+      </p:sp>
+      <p:sp>
+        <p:nvSpPr>
+          <p:cNvPr id="4" name="TextBox 3"/>
+          <p:cNvSpPr txBox="1"/>
+          <p:nvPr/>
+        </p:nvSpPr>
+        <p:spPr>
+          <a:xfrm>
+            <a:off x="731520" y="3657600"/>
+            <a:ext cx="7680960" cy="457200"/>
+          </a:xfrm>
+          <a:prstGeom prst="rect">
+            <a:avLst/>
+          </a:prstGeom>
+          <a:noFill/>
+        </p:spPr>
+        <p:txBody>
+          <a:bodyPr wrap="square">
+            <a:spAutoFit/>
+          </a:bodyPr>
+          <a:lstStyle/>
+          <a:p>
+            <a:pPr algn="ctr">
+              <a:defRPr sz="1600" b="0">
+                <a:solidFill>
+                  <a:srgbClr val="A0CFA0"/>
+                </a:solidFill>
+              </a:defRPr>
+            </a:pPr>
+            <a:r>
+              <a:t>Université de Mostaganem — MCB</a:t>
             </a:r>
           </a:p>
         </p:txBody>
@@ -3179,15 +3220,20 @@
   <p:clrMapOvr>
     <a:masterClrMapping/>
   </p:clrMapOvr>
-  <p:transition spd="med">
-    <p:fade/>
-  </p:transition>
 </p:sld>
 </file>
 
 <file path=ppt/slides/slide10.xml><?xml version="1.0" encoding="utf-8"?>
 <p:sld xmlns:a="http://schemas.openxmlformats.org/drawingml/2006/main" xmlns:p="http://schemas.openxmlformats.org/presentationml/2006/main" xmlns:r="http://schemas.openxmlformats.org/officeDocument/2006/relationships">
   <p:cSld>
+    <p:bg>
+      <p:bgPr>
+        <a:solidFill>
+          <a:srgbClr val="FFFFFF"/>
+        </a:solidFill>
+        <a:effectLst/>
+      </p:bgPr>
+    </p:bg>
     <p:spTree>
       <p:nvGrpSpPr>
         <p:cNvPr id="1" name=""/>
@@ -3197,83 +3243,57 @@
       <p:grpSpPr/>
       <p:sp>
         <p:nvSpPr>
-          <p:cNvPr id="2" name="Title 1"/>
-          <p:cNvSpPr>
-            <a:spLocks noGrp="1"/>
-          </p:cNvSpPr>
-          <p:nvPr>
-            <p:ph type="title"/>
-          </p:nvPr>
-        </p:nvSpPr>
-        <p:spPr/>
-        <p:txBody>
-          <a:bodyPr/>
-          <a:lstStyle/>
-          <a:p>
-            <a:r>
-              <a:t>Projet ENS2</a:t>
-            </a:r>
-          </a:p>
-        </p:txBody>
-      </p:sp>
-      <p:sp>
-        <p:nvSpPr>
-          <p:cNvPr id="3" name="Content Placeholder 2"/>
-          <p:cNvSpPr>
-            <a:spLocks noGrp="1"/>
-          </p:cNvSpPr>
-          <p:nvPr>
-            <p:ph idx="1"/>
-          </p:nvPr>
-        </p:nvSpPr>
-        <p:spPr/>
-        <p:txBody>
-          <a:bodyPr/>
-          <a:lstStyle/>
-          <a:p>
-            <a:pPr>
-              <a:defRPr sz="2000"/>
-            </a:pPr>
-            <a:r>
-              <a:t>✅ Séquence + maquette LMS</a:t>
-            </a:r>
-          </a:p>
-          <a:p>
-            <a:pPr>
-              <a:defRPr sz="2000"/>
-            </a:pPr>
-            <a:r>
-              <a:t>✅ Portfolio 10–15 p.</a:t>
-            </a:r>
-          </a:p>
-          <a:p>
-            <a:pPr>
-              <a:defRPr sz="2000"/>
-            </a:pPr>
-            <a:r>
-              <a:t>✅ TD 1h30 — 5 exercices</a:t>
-            </a:r>
-          </a:p>
-          <a:p>
-            <a:pPr>
-              <a:defRPr sz="2000"/>
-            </a:pPr>
-            <a:r>
-              <a:t>✅ Questions ?</a:t>
-            </a:r>
-          </a:p>
-        </p:txBody>
-      </p:sp>
-      <p:sp>
-        <p:nvSpPr>
-          <p:cNvPr id="4" name="TextBox 3"/>
+          <p:cNvPr id="2" name="Rectangle 1"/>
+          <p:cNvSpPr/>
+          <p:nvPr/>
+        </p:nvSpPr>
+        <p:spPr>
+          <a:xfrm>
+            <a:off x="0" y="0"/>
+            <a:ext cx="109728" cy="6858000"/>
+          </a:xfrm>
+          <a:prstGeom prst="rect">
+            <a:avLst/>
+          </a:prstGeom>
+          <a:solidFill>
+            <a:srgbClr val="2C6E49"/>
+          </a:solidFill>
+          <a:ln>
+            <a:noFill/>
+          </a:ln>
+        </p:spPr>
+        <p:style>
+          <a:lnRef idx="1">
+            <a:schemeClr val="accent1"/>
+          </a:lnRef>
+          <a:fillRef idx="3">
+            <a:schemeClr val="accent1"/>
+          </a:fillRef>
+          <a:effectRef idx="2">
+            <a:schemeClr val="accent1"/>
+          </a:effectRef>
+          <a:fontRef idx="minor">
+            <a:schemeClr val="lt1"/>
+          </a:fontRef>
+        </p:style>
+        <p:txBody>
+          <a:bodyPr rtlCol="0" anchor="ctr"/>
+          <a:lstStyle/>
+          <a:p>
+            <a:pPr algn="ctr"/>
+          </a:p>
+        </p:txBody>
+      </p:sp>
+      <p:sp>
+        <p:nvSpPr>
+          <p:cNvPr id="3" name="TextBox 2"/>
           <p:cNvSpPr txBox="1"/>
           <p:nvPr/>
         </p:nvSpPr>
         <p:spPr>
           <a:xfrm>
-            <a:off x="365760" y="6446520"/>
-            <a:ext cx="8412480" cy="320040"/>
+            <a:off x="457200" y="365760"/>
+            <a:ext cx="8229600" cy="640080"/>
           </a:xfrm>
           <a:prstGeom prst="rect">
             <a:avLst/>
@@ -3281,20 +3301,103 @@
           <a:noFill/>
         </p:spPr>
         <p:txBody>
-          <a:bodyPr wrap="none">
+          <a:bodyPr wrap="square">
             <a:spAutoFit/>
           </a:bodyPr>
           <a:lstStyle/>
           <a:p>
-            <a:pPr algn="ctr">
-              <a:defRPr sz="900">
-                <a:solidFill>
-                  <a:srgbClr val="404040"/>
-                </a:solidFill>
-              </a:defRPr>
-            </a:pPr>
-            <a:r>
-              <a:t>TIC — ENS 2ème année — Module Langues  •  Diapositive 10/10</a:t>
+            <a:pPr algn="l">
+              <a:defRPr sz="2200" b="1">
+                <a:solidFill>
+                  <a:srgbClr val="1A5C33"/>
+                </a:solidFill>
+              </a:defRPr>
+            </a:pPr>
+            <a:r>
+              <a:t>7. Éthique et Sécurité(10 min)</a:t>
+            </a:r>
+          </a:p>
+        </p:txBody>
+      </p:sp>
+      <p:sp>
+        <p:nvSpPr>
+          <p:cNvPr id="4" name="TextBox 3"/>
+          <p:cNvSpPr txBox="1"/>
+          <p:nvPr/>
+        </p:nvSpPr>
+        <p:spPr>
+          <a:xfrm>
+            <a:off x="457200" y="1371600"/>
+            <a:ext cx="7772400" cy="4572000"/>
+          </a:xfrm>
+          <a:prstGeom prst="rect">
+            <a:avLst/>
+          </a:prstGeom>
+          <a:noFill/>
+        </p:spPr>
+        <p:txBody>
+          <a:bodyPr wrap="square">
+            <a:spAutoFit/>
+          </a:bodyPr>
+          <a:lstStyle/>
+          <a:p>
+            <a:pPr>
+              <a:spcAft>
+                <a:spcPts val="600"/>
+              </a:spcAft>
+              <a:defRPr sz="1400">
+                <a:solidFill>
+                  <a:srgbClr val="222222"/>
+                </a:solidFill>
+              </a:defRPr>
+            </a:pPr>
+            <a:r>
+              <a:t>• Respect du RGPD: données des élèves protégées</a:t>
+            </a:r>
+          </a:p>
+          <a:p>
+            <a:pPr>
+              <a:spcAft>
+                <a:spcPts val="600"/>
+              </a:spcAft>
+              <a:defRPr sz="1400">
+                <a:solidFill>
+                  <a:srgbClr val="222222"/>
+                </a:solidFill>
+              </a:defRPr>
+            </a:pPr>
+            <a:r>
+              <a:t>• Droit d'auteur: ressources libres de droit (Creative Commons)</a:t>
+            </a:r>
+          </a:p>
+          <a:p>
+            <a:pPr>
+              <a:spcAft>
+                <a:spcPts val="600"/>
+              </a:spcAft>
+              <a:defRPr sz="1400">
+                <a:solidFill>
+                  <a:srgbClr val="222222"/>
+                </a:solidFill>
+              </a:defRPr>
+            </a:pPr>
+            <a:r>
+              <a:t>• Cyberharcèlement: prévention en classe</a:t>
+            </a:r>
+          </a:p>
+          <a:p>
+            <a:pPr>
+              <a:spcAft>
+                <a:spcPts val="600"/>
+              </a:spcAft>
+              <a:defRPr sz="1400">
+                <a:solidFill>
+                  <a:srgbClr val="222222"/>
+                </a:solidFill>
+              </a:defRPr>
+            </a:pPr>
+            <a:r>
+              <a:t>• Identité numérique: l'enseignant comme modèle</a:t>
             </a:r>
           </a:p>
         </p:txBody>
@@ -3304,15 +3407,20 @@
   <p:clrMapOvr>
     <a:masterClrMapping/>
   </p:clrMapOvr>
-  <p:transition spd="med">
-    <p:fade/>
-  </p:transition>
 </p:sld>
 </file>
 
-<file path=ppt/slides/slide2.xml><?xml version="1.0" encoding="utf-8"?>
+<file path=ppt/slides/slide11.xml><?xml version="1.0" encoding="utf-8"?>
 <p:sld xmlns:a="http://schemas.openxmlformats.org/drawingml/2006/main" xmlns:p="http://schemas.openxmlformats.org/presentationml/2006/main" xmlns:r="http://schemas.openxmlformats.org/officeDocument/2006/relationships">
   <p:cSld>
+    <p:bg>
+      <p:bgPr>
+        <a:solidFill>
+          <a:srgbClr val="FFFFFF"/>
+        </a:solidFill>
+        <a:effectLst/>
+      </p:bgPr>
+    </p:bg>
     <p:spTree>
       <p:nvGrpSpPr>
         <p:cNvPr id="1" name=""/>
@@ -3322,99 +3430,57 @@
       <p:grpSpPr/>
       <p:sp>
         <p:nvSpPr>
-          <p:cNvPr id="2" name="Title 1"/>
-          <p:cNvSpPr>
-            <a:spLocks noGrp="1"/>
-          </p:cNvSpPr>
-          <p:nvPr>
-            <p:ph type="title"/>
-          </p:nvPr>
-        </p:nvSpPr>
-        <p:spPr/>
-        <p:txBody>
-          <a:bodyPr/>
-          <a:lstStyle/>
-          <a:p>
-            <a:r>
-              <a:t>Objectifs ENS2</a:t>
-            </a:r>
-          </a:p>
-        </p:txBody>
-      </p:sp>
-      <p:sp>
-        <p:nvSpPr>
-          <p:cNvPr id="3" name="Content Placeholder 2"/>
-          <p:cNvSpPr>
-            <a:spLocks noGrp="1"/>
-          </p:cNvSpPr>
-          <p:nvPr>
-            <p:ph idx="1"/>
-          </p:nvPr>
-        </p:nvSpPr>
-        <p:spPr/>
-        <p:txBody>
-          <a:bodyPr/>
-          <a:lstStyle/>
-          <a:p>
-            <a:pPr>
-              <a:defRPr sz="2000"/>
-            </a:pPr>
-            <a:r>
-              <a:t>🎯 Séquence 2–3 séances</a:t>
-            </a:r>
-          </a:p>
-          <a:p>
-            <a:pPr>
-              <a:defRPr sz="2000"/>
-            </a:pPr>
-            <a:r>
-              <a:t>🎯 Moodle avancé</a:t>
-            </a:r>
-          </a:p>
-          <a:p>
-            <a:pPr>
-              <a:defRPr sz="2000"/>
-            </a:pPr>
-            <a:r>
-              <a:t>🎯 Portfolio stage</a:t>
-            </a:r>
-          </a:p>
-          <a:p>
-            <a:pPr>
-              <a:defRPr sz="2000"/>
-            </a:pPr>
-            <a:r>
-              <a:t>🎯 OER / médias</a:t>
-            </a:r>
-          </a:p>
-          <a:p>
-            <a:pPr>
-              <a:defRPr sz="2000"/>
-            </a:pPr>
-            <a:r>
-              <a:t>🎯 Charte IA</a:t>
-            </a:r>
-          </a:p>
-          <a:p>
-            <a:pPr>
-              <a:defRPr sz="2000"/>
-            </a:pPr>
-            <a:r>
-              <a:t>🎯 Recherche-action</a:t>
-            </a:r>
-          </a:p>
-        </p:txBody>
-      </p:sp>
-      <p:sp>
-        <p:nvSpPr>
-          <p:cNvPr id="4" name="TextBox 3"/>
+          <p:cNvPr id="2" name="Rectangle 1"/>
+          <p:cNvSpPr/>
+          <p:nvPr/>
+        </p:nvSpPr>
+        <p:spPr>
+          <a:xfrm>
+            <a:off x="0" y="0"/>
+            <a:ext cx="109728" cy="6858000"/>
+          </a:xfrm>
+          <a:prstGeom prst="rect">
+            <a:avLst/>
+          </a:prstGeom>
+          <a:solidFill>
+            <a:srgbClr val="2C6E49"/>
+          </a:solidFill>
+          <a:ln>
+            <a:noFill/>
+          </a:ln>
+        </p:spPr>
+        <p:style>
+          <a:lnRef idx="1">
+            <a:schemeClr val="accent1"/>
+          </a:lnRef>
+          <a:fillRef idx="3">
+            <a:schemeClr val="accent1"/>
+          </a:fillRef>
+          <a:effectRef idx="2">
+            <a:schemeClr val="accent1"/>
+          </a:effectRef>
+          <a:fontRef idx="minor">
+            <a:schemeClr val="lt1"/>
+          </a:fontRef>
+        </p:style>
+        <p:txBody>
+          <a:bodyPr rtlCol="0" anchor="ctr"/>
+          <a:lstStyle/>
+          <a:p>
+            <a:pPr algn="ctr"/>
+          </a:p>
+        </p:txBody>
+      </p:sp>
+      <p:sp>
+        <p:nvSpPr>
+          <p:cNvPr id="3" name="TextBox 2"/>
           <p:cNvSpPr txBox="1"/>
           <p:nvPr/>
         </p:nvSpPr>
         <p:spPr>
           <a:xfrm>
-            <a:off x="365760" y="6446520"/>
-            <a:ext cx="8412480" cy="320040"/>
+            <a:off x="457200" y="365760"/>
+            <a:ext cx="8229600" cy="640080"/>
           </a:xfrm>
           <a:prstGeom prst="rect">
             <a:avLst/>
@@ -3422,20 +3488,103 @@
           <a:noFill/>
         </p:spPr>
         <p:txBody>
-          <a:bodyPr wrap="none">
+          <a:bodyPr wrap="square">
             <a:spAutoFit/>
           </a:bodyPr>
           <a:lstStyle/>
           <a:p>
-            <a:pPr algn="ctr">
-              <a:defRPr sz="900">
-                <a:solidFill>
-                  <a:srgbClr val="404040"/>
-                </a:solidFill>
-              </a:defRPr>
-            </a:pPr>
-            <a:r>
-              <a:t>TIC — ENS 2ème année — Module Langues  •  Diapositive 2/10</a:t>
+            <a:pPr algn="l">
+              <a:defRPr sz="2200" b="1">
+                <a:solidFill>
+                  <a:srgbClr val="1A5C33"/>
+                </a:solidFill>
+              </a:defRPr>
+            </a:pPr>
+            <a:r>
+              <a:t>8. Conclusion(5 min)</a:t>
+            </a:r>
+          </a:p>
+        </p:txBody>
+      </p:sp>
+      <p:sp>
+        <p:nvSpPr>
+          <p:cNvPr id="4" name="TextBox 3"/>
+          <p:cNvSpPr txBox="1"/>
+          <p:nvPr/>
+        </p:nvSpPr>
+        <p:spPr>
+          <a:xfrm>
+            <a:off x="457200" y="1371600"/>
+            <a:ext cx="7772400" cy="4572000"/>
+          </a:xfrm>
+          <a:prstGeom prst="rect">
+            <a:avLst/>
+          </a:prstGeom>
+          <a:noFill/>
+        </p:spPr>
+        <p:txBody>
+          <a:bodyPr wrap="square">
+            <a:spAutoFit/>
+          </a:bodyPr>
+          <a:lstStyle/>
+          <a:p>
+            <a:pPr>
+              <a:spcAft>
+                <a:spcPts val="600"/>
+              </a:spcAft>
+              <a:defRPr sz="1400">
+                <a:solidFill>
+                  <a:srgbClr val="222222"/>
+                </a:solidFill>
+              </a:defRPr>
+            </a:pPr>
+            <a:r>
+              <a:t>• Les TIC sont unlevier pédagogiquepour l'enseignant de langues</a:t>
+            </a:r>
+          </a:p>
+          <a:p>
+            <a:pPr>
+              <a:spcAft>
+                <a:spcPts val="600"/>
+              </a:spcAft>
+              <a:defRPr sz="1400">
+                <a:solidFill>
+                  <a:srgbClr val="222222"/>
+                </a:solidFill>
+              </a:defRPr>
+            </a:pPr>
+            <a:r>
+              <a:t>• L'intégration doit êtreréfléchie(modèle SAMR)</a:t>
+            </a:r>
+          </a:p>
+          <a:p>
+            <a:pPr>
+              <a:spcAft>
+                <a:spcPts val="600"/>
+              </a:spcAft>
+              <a:defRPr sz="1400">
+                <a:solidFill>
+                  <a:srgbClr val="222222"/>
+                </a:solidFill>
+              </a:defRPr>
+            </a:pPr>
+            <a:r>
+              <a:t>• Le futur enseignant doit développer sescompétences numériques</a:t>
+            </a:r>
+          </a:p>
+          <a:p>
+            <a:pPr>
+              <a:spcAft>
+                <a:spcPts val="600"/>
+              </a:spcAft>
+              <a:defRPr sz="1400">
+                <a:solidFill>
+                  <a:srgbClr val="222222"/>
+                </a:solidFill>
+              </a:defRPr>
+            </a:pPr>
+            <a:r>
+              <a:t>• TD 01(1h30) — analyse d'outils TIC pour la classe.Prochain cours :Matériel informatique et architecture.</a:t>
             </a:r>
           </a:p>
         </p:txBody>
@@ -3445,15 +3594,20 @@
   <p:clrMapOvr>
     <a:masterClrMapping/>
   </p:clrMapOvr>
-  <p:transition spd="med">
-    <p:fade/>
-  </p:transition>
 </p:sld>
 </file>
 
-<file path=ppt/slides/slide3.xml><?xml version="1.0" encoding="utf-8"?>
+<file path=ppt/slides/slide12.xml><?xml version="1.0" encoding="utf-8"?>
 <p:sld xmlns:a="http://schemas.openxmlformats.org/drawingml/2006/main" xmlns:p="http://schemas.openxmlformats.org/presentationml/2006/main" xmlns:r="http://schemas.openxmlformats.org/officeDocument/2006/relationships">
   <p:cSld>
+    <p:bg>
+      <p:bgPr>
+        <a:solidFill>
+          <a:srgbClr val="FFFFFF"/>
+        </a:solidFill>
+        <a:effectLst/>
+      </p:bgPr>
+    </p:bg>
     <p:spTree>
       <p:nvGrpSpPr>
         <p:cNvPr id="1" name=""/>
@@ -3463,99 +3617,57 @@
       <p:grpSpPr/>
       <p:sp>
         <p:nvSpPr>
-          <p:cNvPr id="2" name="Title 1"/>
-          <p:cNvSpPr>
-            <a:spLocks noGrp="1"/>
-          </p:cNvSpPr>
-          <p:nvPr>
-            <p:ph type="title"/>
-          </p:nvPr>
-        </p:nvSpPr>
-        <p:spPr/>
-        <p:txBody>
-          <a:bodyPr/>
-          <a:lstStyle/>
-          <a:p>
-            <a:r>
-              <a:t>Plan</a:t>
-            </a:r>
-          </a:p>
-        </p:txBody>
-      </p:sp>
-      <p:sp>
-        <p:nvSpPr>
-          <p:cNvPr id="3" name="Content Placeholder 2"/>
-          <p:cNvSpPr>
-            <a:spLocks noGrp="1"/>
-          </p:cNvSpPr>
-          <p:nvPr>
-            <p:ph idx="1"/>
-          </p:nvPr>
-        </p:nvSpPr>
-        <p:spPr/>
-        <p:txBody>
-          <a:bodyPr/>
-          <a:lstStyle/>
-          <a:p>
-            <a:pPr>
-              <a:defRPr sz="2000"/>
-            </a:pPr>
-            <a:r>
-              <a:t>📋 DigCompEdu B1</a:t>
-            </a:r>
-          </a:p>
-          <a:p>
-            <a:pPr>
-              <a:defRPr sz="2000"/>
-            </a:pPr>
-            <a:r>
-              <a:t>📋 Scénarisation</a:t>
-            </a:r>
-          </a:p>
-          <a:p>
-            <a:pPr>
-              <a:defRPr sz="2000"/>
-            </a:pPr>
-            <a:r>
-              <a:t>📋 LMS éval.</a:t>
-            </a:r>
-          </a:p>
-          <a:p>
-            <a:pPr>
-              <a:defRPr sz="2000"/>
-            </a:pPr>
-            <a:r>
-              <a:t>📋 OER</a:t>
-            </a:r>
-          </a:p>
-          <a:p>
-            <a:pPr>
-              <a:defRPr sz="2000"/>
-            </a:pPr>
-            <a:r>
-              <a:t>📋 Portfolio</a:t>
-            </a:r>
-          </a:p>
-          <a:p>
-            <a:pPr>
-              <a:defRPr sz="2000"/>
-            </a:pPr>
-            <a:r>
-              <a:t>📋 Hybride</a:t>
-            </a:r>
-          </a:p>
-        </p:txBody>
-      </p:sp>
-      <p:sp>
-        <p:nvSpPr>
-          <p:cNvPr id="4" name="TextBox 3"/>
+          <p:cNvPr id="2" name="Rectangle 1"/>
+          <p:cNvSpPr/>
+          <p:nvPr/>
+        </p:nvSpPr>
+        <p:spPr>
+          <a:xfrm>
+            <a:off x="0" y="0"/>
+            <a:ext cx="109728" cy="6858000"/>
+          </a:xfrm>
+          <a:prstGeom prst="rect">
+            <a:avLst/>
+          </a:prstGeom>
+          <a:solidFill>
+            <a:srgbClr val="2C6E49"/>
+          </a:solidFill>
+          <a:ln>
+            <a:noFill/>
+          </a:ln>
+        </p:spPr>
+        <p:style>
+          <a:lnRef idx="1">
+            <a:schemeClr val="accent1"/>
+          </a:lnRef>
+          <a:fillRef idx="3">
+            <a:schemeClr val="accent1"/>
+          </a:fillRef>
+          <a:effectRef idx="2">
+            <a:schemeClr val="accent1"/>
+          </a:effectRef>
+          <a:fontRef idx="minor">
+            <a:schemeClr val="lt1"/>
+          </a:fontRef>
+        </p:style>
+        <p:txBody>
+          <a:bodyPr rtlCol="0" anchor="ctr"/>
+          <a:lstStyle/>
+          <a:p>
+            <a:pPr algn="ctr"/>
+          </a:p>
+        </p:txBody>
+      </p:sp>
+      <p:sp>
+        <p:nvSpPr>
+          <p:cNvPr id="3" name="TextBox 2"/>
           <p:cNvSpPr txBox="1"/>
           <p:nvPr/>
         </p:nvSpPr>
         <p:spPr>
           <a:xfrm>
-            <a:off x="365760" y="6446520"/>
-            <a:ext cx="8412480" cy="320040"/>
+            <a:off x="457200" y="365760"/>
+            <a:ext cx="8229600" cy="640080"/>
           </a:xfrm>
           <a:prstGeom prst="rect">
             <a:avLst/>
@@ -3563,20 +3675,88 @@
           <a:noFill/>
         </p:spPr>
         <p:txBody>
-          <a:bodyPr wrap="none">
+          <a:bodyPr wrap="square">
             <a:spAutoFit/>
           </a:bodyPr>
           <a:lstStyle/>
           <a:p>
-            <a:pPr algn="ctr">
-              <a:defRPr sz="900">
-                <a:solidFill>
-                  <a:srgbClr val="404040"/>
-                </a:solidFill>
-              </a:defRPr>
-            </a:pPr>
-            <a:r>
-              <a:t>TIC — ENS 2ème année — Module Langues  •  Diapositive 3/10</a:t>
+            <a:pPr algn="l">
+              <a:defRPr sz="2200" b="1">
+                <a:solidFill>
+                  <a:srgbClr val="1A5C33"/>
+                </a:solidFill>
+              </a:defRPr>
+            </a:pPr>
+            <a:r>
+              <a:t>Fiche cours — Plateforme e-learning (Moodle)</a:t>
+            </a:r>
+          </a:p>
+        </p:txBody>
+      </p:sp>
+      <p:sp>
+        <p:nvSpPr>
+          <p:cNvPr id="4" name="TextBox 3"/>
+          <p:cNvSpPr txBox="1"/>
+          <p:nvPr/>
+        </p:nvSpPr>
+        <p:spPr>
+          <a:xfrm>
+            <a:off x="457200" y="1371600"/>
+            <a:ext cx="7772400" cy="4572000"/>
+          </a:xfrm>
+          <a:prstGeom prst="rect">
+            <a:avLst/>
+          </a:prstGeom>
+          <a:noFill/>
+        </p:spPr>
+        <p:txBody>
+          <a:bodyPr wrap="square">
+            <a:spAutoFit/>
+          </a:bodyPr>
+          <a:lstStyle/>
+          <a:p>
+            <a:pPr>
+              <a:spcAft>
+                <a:spcPts val="600"/>
+              </a:spcAft>
+              <a:defRPr sz="1400">
+                <a:solidFill>
+                  <a:srgbClr val="222222"/>
+                </a:solidFill>
+              </a:defRPr>
+            </a:pPr>
+            <a:r>
+              <a:t>• Référentiel :titres et structure alignés sur Canvas Univ-Mosta (elearning.univ-usto.dz) ; bonnes pratiques benchmark 10 universités algériennes (voirBENCHMARK_10_UNIVERSITES_ELEARNING.md).</a:t>
+            </a:r>
+          </a:p>
+          <a:p>
+            <a:pPr>
+              <a:spcAft>
+                <a:spcPts val="600"/>
+              </a:spcAft>
+              <a:defRPr sz="1400">
+                <a:solidFill>
+                  <a:srgbClr val="222222"/>
+                </a:solidFill>
+              </a:defRPr>
+            </a:pPr>
+            <a:r>
+              <a:t>• Public visé :Licence 1 Langues, ENS 1ère année</a:t>
+            </a:r>
+          </a:p>
+          <a:p>
+            <a:pPr>
+              <a:spcAft>
+                <a:spcPts val="600"/>
+              </a:spcAft>
+              <a:defRPr sz="1400">
+                <a:solidFill>
+                  <a:srgbClr val="222222"/>
+                </a:solidFill>
+              </a:defRPr>
+            </a:pPr>
+            <a:r>
+              <a:t>• Compétences pré-requises :Séance TIC 01 ; notions de fichiers et dossiers</a:t>
             </a:r>
           </a:p>
         </p:txBody>
@@ -3586,15 +3766,20 @@
   <p:clrMapOvr>
     <a:masterClrMapping/>
   </p:clrMapOvr>
-  <p:transition spd="med">
-    <p:fade/>
-  </p:transition>
 </p:sld>
 </file>
 
-<file path=ppt/slides/slide4.xml><?xml version="1.0" encoding="utf-8"?>
+<file path=ppt/slides/slide13.xml><?xml version="1.0" encoding="utf-8"?>
 <p:sld xmlns:a="http://schemas.openxmlformats.org/drawingml/2006/main" xmlns:p="http://schemas.openxmlformats.org/presentationml/2006/main" xmlns:r="http://schemas.openxmlformats.org/officeDocument/2006/relationships">
   <p:cSld>
+    <p:bg>
+      <p:bgPr>
+        <a:solidFill>
+          <a:srgbClr val="E8F0E9"/>
+        </a:solidFill>
+        <a:effectLst/>
+      </p:bgPr>
+    </p:bg>
     <p:spTree>
       <p:nvGrpSpPr>
         <p:cNvPr id="1" name=""/>
@@ -3604,83 +3789,14 @@
       <p:grpSpPr/>
       <p:sp>
         <p:nvSpPr>
-          <p:cNvPr id="2" name="Title 1"/>
-          <p:cNvSpPr>
-            <a:spLocks noGrp="1"/>
-          </p:cNvSpPr>
-          <p:nvPr>
-            <p:ph type="title"/>
-          </p:nvPr>
-        </p:nvSpPr>
-        <p:spPr/>
-        <p:txBody>
-          <a:bodyPr/>
-          <a:lstStyle/>
-          <a:p>
-            <a:r>
-              <a:t>Scénarisation</a:t>
-            </a:r>
-          </a:p>
-        </p:txBody>
-      </p:sp>
-      <p:sp>
-        <p:nvSpPr>
-          <p:cNvPr id="3" name="Content Placeholder 2"/>
-          <p:cNvSpPr>
-            <a:spLocks noGrp="1"/>
-          </p:cNvSpPr>
-          <p:nvPr>
-            <p:ph idx="1"/>
-          </p:nvPr>
-        </p:nvSpPr>
-        <p:spPr/>
-        <p:txBody>
-          <a:bodyPr/>
-          <a:lstStyle/>
-          <a:p>
-            <a:pPr>
-              <a:defRPr sz="2000"/>
-            </a:pPr>
-            <a:r>
-              <a:t>🧭 Alignement CECRL</a:t>
-            </a:r>
-          </a:p>
-          <a:p>
-            <a:pPr>
-              <a:defRPr sz="2000"/>
-            </a:pPr>
-            <a:r>
-              <a:t>🧭 2–3 séances</a:t>
-            </a:r>
-          </a:p>
-          <a:p>
-            <a:pPr>
-              <a:defRPr sz="2000"/>
-            </a:pPr>
-            <a:r>
-              <a:t>🧭 Tâches authentiques</a:t>
-            </a:r>
-          </a:p>
-          <a:p>
-            <a:pPr>
-              <a:defRPr sz="2000"/>
-            </a:pPr>
-            <a:r>
-              <a:t>🧭 Critères réussite</a:t>
-            </a:r>
-          </a:p>
-        </p:txBody>
-      </p:sp>
-      <p:sp>
-        <p:nvSpPr>
-          <p:cNvPr id="4" name="TextBox 3"/>
+          <p:cNvPr id="2" name="TextBox 1"/>
           <p:cNvSpPr txBox="1"/>
           <p:nvPr/>
         </p:nvSpPr>
         <p:spPr>
           <a:xfrm>
-            <a:off x="365760" y="6446520"/>
-            <a:ext cx="8412480" cy="320040"/>
+            <a:off x="548640" y="365760"/>
+            <a:ext cx="7772400" cy="640080"/>
           </a:xfrm>
           <a:prstGeom prst="rect">
             <a:avLst/>
@@ -3688,20 +3804,138 @@
           <a:noFill/>
         </p:spPr>
         <p:txBody>
-          <a:bodyPr wrap="none">
+          <a:bodyPr wrap="square">
             <a:spAutoFit/>
           </a:bodyPr>
           <a:lstStyle/>
           <a:p>
             <a:pPr algn="ctr">
-              <a:defRPr sz="900">
-                <a:solidFill>
-                  <a:srgbClr val="404040"/>
-                </a:solidFill>
-              </a:defRPr>
-            </a:pPr>
-            <a:r>
-              <a:t>TIC — ENS 2ème année — Module Langues  •  Diapositive 4/10</a:t>
+              <a:defRPr sz="2600" b="1">
+                <a:solidFill>
+                  <a:srgbClr val="1A5C33"/>
+                </a:solidFill>
+              </a:defRPr>
+            </a:pPr>
+            <a:r>
+              <a:t>📝 Points clés à retenir</a:t>
+            </a:r>
+          </a:p>
+        </p:txBody>
+      </p:sp>
+      <p:sp>
+        <p:nvSpPr>
+          <p:cNvPr id="3" name="TextBox 2"/>
+          <p:cNvSpPr txBox="1"/>
+          <p:nvPr/>
+        </p:nvSpPr>
+        <p:spPr>
+          <a:xfrm>
+            <a:off x="548640" y="1828800"/>
+            <a:ext cx="7772400" cy="4572000"/>
+          </a:xfrm>
+          <a:prstGeom prst="rect">
+            <a:avLst/>
+          </a:prstGeom>
+          <a:noFill/>
+        </p:spPr>
+        <p:txBody>
+          <a:bodyPr wrap="square">
+            <a:spAutoFit/>
+          </a:bodyPr>
+          <a:lstStyle/>
+          <a:p>
+            <a:pPr>
+              <a:spcAft>
+                <a:spcPts val="600"/>
+              </a:spcAft>
+              <a:defRPr sz="1600">
+                <a:solidFill>
+                  <a:srgbClr val="222222"/>
+                </a:solidFill>
+              </a:defRPr>
+            </a:pPr>
+            <a:r>
+              <a:t>• Public visé :Étudiants ENS — futurs enseignants de langues</a:t>
+            </a:r>
+          </a:p>
+          <a:p>
+            <a:pPr>
+              <a:spcAft>
+                <a:spcPts val="600"/>
+              </a:spcAft>
+              <a:defRPr sz="1600">
+                <a:solidFill>
+                  <a:srgbClr val="222222"/>
+                </a:solidFill>
+              </a:defRPr>
+            </a:pPr>
+            <a:r>
+              <a:t>• Savoir :- Définir les TIC et leur évolution</a:t>
+            </a:r>
+            <a:br/>
+            <a:r>
+              <a:t>- Distinguer les dimensions technique, information, communication</a:t>
+            </a:r>
+            <a:br/>
+            <a:r>
+              <a:t>- Comprendre l'intégration pédagogique des TIC en didactique des langues</a:t>
+            </a:r>
+          </a:p>
+          <a:p>
+            <a:pPr>
+              <a:spcAft>
+                <a:spcPts val="600"/>
+              </a:spcAft>
+              <a:defRPr sz="1600">
+                <a:solidFill>
+                  <a:srgbClr val="222222"/>
+                </a:solidFill>
+              </a:defRPr>
+            </a:pPr>
+            <a:r>
+              <a:t>• Définition et évolution des TIC</a:t>
+            </a:r>
+          </a:p>
+          <a:p>
+            <a:pPr>
+              <a:spcAft>
+                <a:spcPts val="600"/>
+              </a:spcAft>
+              <a:defRPr sz="1600">
+                <a:solidFill>
+                  <a:srgbClr val="222222"/>
+                </a:solidFill>
+              </a:defRPr>
+            </a:pPr>
+            <a:r>
+              <a:t>• LesTechniques de l'Information et de la Communication(TIC) englobent les outils et systèmes numériques permettant de créer, traiter, stocker, transmettre et partager l'information.</a:t>
+            </a:r>
+          </a:p>
+          <a:p>
+            <a:pPr>
+              <a:spcAft>
+                <a:spcPts val="600"/>
+              </a:spcAft>
+              <a:defRPr sz="1600">
+                <a:solidFill>
+                  <a:srgbClr val="222222"/>
+                </a:solidFill>
+              </a:defRPr>
+            </a:pPr>
+            <a:r>
+              <a:t>• Pourquoi intégrer les TIC en classe de langues ?- Motivation et engagement des apprenants</a:t>
+            </a:r>
+            <a:br/>
+            <a:r>
+              <a:t>- Accès à des ressources authentiques (vidéos, articles, podcasts)</a:t>
+            </a:r>
+            <a:br/>
+            <a:r>
+              <a:t>- Individualisation des parcours</a:t>
+            </a:r>
+            <a:br/>
+            <a:r>
+              <a:t>- Développement de l'autonomie</a:t>
             </a:r>
           </a:p>
         </p:txBody>
@@ -3711,15 +3945,20 @@
   <p:clrMapOvr>
     <a:masterClrMapping/>
   </p:clrMapOvr>
-  <p:transition spd="med">
-    <p:fade/>
-  </p:transition>
 </p:sld>
 </file>
 
-<file path=ppt/slides/slide5.xml><?xml version="1.0" encoding="utf-8"?>
+<file path=ppt/slides/slide14.xml><?xml version="1.0" encoding="utf-8"?>
 <p:sld xmlns:a="http://schemas.openxmlformats.org/drawingml/2006/main" xmlns:p="http://schemas.openxmlformats.org/presentationml/2006/main" xmlns:r="http://schemas.openxmlformats.org/officeDocument/2006/relationships">
   <p:cSld>
+    <p:bg>
+      <p:bgPr>
+        <a:solidFill>
+          <a:srgbClr val="FFFFFF"/>
+        </a:solidFill>
+        <a:effectLst/>
+      </p:bgPr>
+    </p:bg>
     <p:spTree>
       <p:nvGrpSpPr>
         <p:cNvPr id="1" name=""/>
@@ -3729,83 +3968,14 @@
       <p:grpSpPr/>
       <p:sp>
         <p:nvSpPr>
-          <p:cNvPr id="2" name="Title 1"/>
-          <p:cNvSpPr>
-            <a:spLocks noGrp="1"/>
-          </p:cNvSpPr>
-          <p:nvPr>
-            <p:ph type="title"/>
-          </p:nvPr>
-        </p:nvSpPr>
-        <p:spPr/>
-        <p:txBody>
-          <a:bodyPr/>
-          <a:lstStyle/>
-          <a:p>
-            <a:r>
-              <a:t>Moodle avancé</a:t>
-            </a:r>
-          </a:p>
-        </p:txBody>
-      </p:sp>
-      <p:sp>
-        <p:nvSpPr>
-          <p:cNvPr id="3" name="Content Placeholder 2"/>
-          <p:cNvSpPr>
-            <a:spLocks noGrp="1"/>
-          </p:cNvSpPr>
-          <p:nvPr>
-            <p:ph idx="1"/>
-          </p:nvPr>
-        </p:nvSpPr>
-        <p:spPr/>
-        <p:txBody>
-          <a:bodyPr/>
-          <a:lstStyle/>
-          <a:p>
-            <a:pPr>
-              <a:defRPr sz="2000"/>
-            </a:pPr>
-            <a:r>
-              <a:t>🖥️ Quiz feedback</a:t>
-            </a:r>
-          </a:p>
-          <a:p>
-            <a:pPr>
-              <a:defRPr sz="2000"/>
-            </a:pPr>
-            <a:r>
-              <a:t>🖥️ Forums modérés</a:t>
-            </a:r>
-          </a:p>
-          <a:p>
-            <a:pPr>
-              <a:defRPr sz="2000"/>
-            </a:pPr>
-            <a:r>
-              <a:t>🖥️ H5P</a:t>
-            </a:r>
-          </a:p>
-          <a:p>
-            <a:pPr>
-              <a:defRPr sz="2000"/>
-            </a:pPr>
-            <a:r>
-              <a:t>🖥️ Grilles devoirs</a:t>
-            </a:r>
-          </a:p>
-        </p:txBody>
-      </p:sp>
-      <p:sp>
-        <p:nvSpPr>
-          <p:cNvPr id="4" name="TextBox 3"/>
+          <p:cNvPr id="2" name="TextBox 1"/>
           <p:cNvSpPr txBox="1"/>
           <p:nvPr/>
         </p:nvSpPr>
         <p:spPr>
           <a:xfrm>
-            <a:off x="365760" y="6446520"/>
-            <a:ext cx="8412480" cy="320040"/>
+            <a:off x="548640" y="365760"/>
+            <a:ext cx="7772400" cy="640080"/>
           </a:xfrm>
           <a:prstGeom prst="rect">
             <a:avLst/>
@@ -3813,20 +3983,118 @@
           <a:noFill/>
         </p:spPr>
         <p:txBody>
-          <a:bodyPr wrap="none">
+          <a:bodyPr wrap="square">
             <a:spAutoFit/>
           </a:bodyPr>
           <a:lstStyle/>
           <a:p>
             <a:pPr algn="ctr">
-              <a:defRPr sz="900">
-                <a:solidFill>
-                  <a:srgbClr val="404040"/>
-                </a:solidFill>
-              </a:defRPr>
-            </a:pPr>
-            <a:r>
-              <a:t>TIC — ENS 2ème année — Module Langues  •  Diapositive 5/10</a:t>
+              <a:defRPr sz="2600" b="1">
+                <a:solidFill>
+                  <a:srgbClr val="1A5C33"/>
+                </a:solidFill>
+              </a:defRPr>
+            </a:pPr>
+            <a:r>
+              <a:t>✏️ Exercices d'application</a:t>
+            </a:r>
+          </a:p>
+        </p:txBody>
+      </p:sp>
+      <p:sp>
+        <p:nvSpPr>
+          <p:cNvPr id="3" name="TextBox 2"/>
+          <p:cNvSpPr txBox="1"/>
+          <p:nvPr/>
+        </p:nvSpPr>
+        <p:spPr>
+          <a:xfrm>
+            <a:off x="548640" y="1828800"/>
+            <a:ext cx="7772400" cy="4572000"/>
+          </a:xfrm>
+          <a:prstGeom prst="rect">
+            <a:avLst/>
+          </a:prstGeom>
+          <a:noFill/>
+        </p:spPr>
+        <p:txBody>
+          <a:bodyPr wrap="square">
+            <a:spAutoFit/>
+          </a:bodyPr>
+          <a:lstStyle/>
+          <a:p>
+            <a:pPr>
+              <a:spcAft>
+                <a:spcPts val="600"/>
+              </a:spcAft>
+              <a:defRPr sz="1500">
+                <a:solidFill>
+                  <a:srgbClr val="222222"/>
+                </a:solidFill>
+              </a:defRPr>
+            </a:pPr>
+            <a:r>
+              <a:t>• Définir les concepts principaux du cours</a:t>
+            </a:r>
+          </a:p>
+          <a:p>
+            <a:pPr>
+              <a:spcAft>
+                <a:spcPts val="600"/>
+              </a:spcAft>
+              <a:defRPr sz="1500">
+                <a:solidFill>
+                  <a:srgbClr val="222222"/>
+                </a:solidFill>
+              </a:defRPr>
+            </a:pPr>
+            <a:r>
+              <a:t>• Identifier les applications pratiques</a:t>
+            </a:r>
+          </a:p>
+          <a:p>
+            <a:pPr>
+              <a:spcAft>
+                <a:spcPts val="600"/>
+              </a:spcAft>
+              <a:defRPr sz="1500">
+                <a:solidFill>
+                  <a:srgbClr val="222222"/>
+                </a:solidFill>
+              </a:defRPr>
+            </a:pPr>
+            <a:r>
+              <a:t>• Résoudre les exercices du TD</a:t>
+            </a:r>
+          </a:p>
+          <a:p>
+            <a:pPr>
+              <a:spcAft>
+                <a:spcPts val="600"/>
+              </a:spcAft>
+              <a:defRPr sz="1500">
+                <a:solidFill>
+                  <a:srgbClr val="222222"/>
+                </a:solidFill>
+              </a:defRPr>
+            </a:pPr>
+            <a:r>
+              <a:t>• Synthétiser les points clés en un paragraphe</a:t>
+            </a:r>
+          </a:p>
+          <a:p>
+            <a:pPr>
+              <a:spcAft>
+                <a:spcPts val="600"/>
+              </a:spcAft>
+              <a:defRPr sz="1500">
+                <a:solidFill>
+                  <a:srgbClr val="222222"/>
+                </a:solidFill>
+              </a:defRPr>
+            </a:pPr>
+            <a:r>
+              <a:t>• Préparer une courte présentation orale</a:t>
             </a:r>
           </a:p>
         </p:txBody>
@@ -3836,15 +4104,20 @@
   <p:clrMapOvr>
     <a:masterClrMapping/>
   </p:clrMapOvr>
-  <p:transition spd="med">
-    <p:fade/>
-  </p:transition>
 </p:sld>
 </file>
 
-<file path=ppt/slides/slide6.xml><?xml version="1.0" encoding="utf-8"?>
+<file path=ppt/slides/slide15.xml><?xml version="1.0" encoding="utf-8"?>
 <p:sld xmlns:a="http://schemas.openxmlformats.org/drawingml/2006/main" xmlns:p="http://schemas.openxmlformats.org/presentationml/2006/main" xmlns:r="http://schemas.openxmlformats.org/officeDocument/2006/relationships">
   <p:cSld>
+    <p:bg>
+      <p:bgPr>
+        <a:solidFill>
+          <a:srgbClr val="1A5C33"/>
+        </a:solidFill>
+        <a:effectLst/>
+      </p:bgPr>
+    </p:bg>
     <p:spTree>
       <p:nvGrpSpPr>
         <p:cNvPr id="1" name=""/>
@@ -3854,83 +4127,14 @@
       <p:grpSpPr/>
       <p:sp>
         <p:nvSpPr>
-          <p:cNvPr id="2" name="Title 1"/>
-          <p:cNvSpPr>
-            <a:spLocks noGrp="1"/>
-          </p:cNvSpPr>
-          <p:nvPr>
-            <p:ph type="title"/>
-          </p:nvPr>
-        </p:nvSpPr>
-        <p:spPr/>
-        <p:txBody>
-          <a:bodyPr/>
-          <a:lstStyle/>
-          <a:p>
-            <a:r>
-              <a:t>Médias et OER</a:t>
-            </a:r>
-          </a:p>
-        </p:txBody>
-      </p:sp>
-      <p:sp>
-        <p:nvSpPr>
-          <p:cNvPr id="3" name="Content Placeholder 2"/>
-          <p:cNvSpPr>
-            <a:spLocks noGrp="1"/>
-          </p:cNvSpPr>
-          <p:nvPr>
-            <p:ph idx="1"/>
-          </p:nvPr>
-        </p:nvSpPr>
-        <p:spPr/>
-        <p:txBody>
-          <a:bodyPr/>
-          <a:lstStyle/>
-          <a:p>
-            <a:pPr>
-              <a:defRPr sz="2000"/>
-            </a:pPr>
-            <a:r>
-              <a:t>🌍 Creative Commons</a:t>
-            </a:r>
-          </a:p>
-          <a:p>
-            <a:pPr>
-              <a:defRPr sz="2000"/>
-            </a:pPr>
-            <a:r>
-              <a:t>🌍 Co-création élèves</a:t>
-            </a:r>
-          </a:p>
-          <a:p>
-            <a:pPr>
-              <a:defRPr sz="2000"/>
-            </a:pPr>
-            <a:r>
-              <a:t>🌍 Sous-titres</a:t>
-            </a:r>
-          </a:p>
-          <a:p>
-            <a:pPr>
-              <a:defRPr sz="2000"/>
-            </a:pPr>
-            <a:r>
-              <a:t>🌍 Modération</a:t>
-            </a:r>
-          </a:p>
-        </p:txBody>
-      </p:sp>
-      <p:sp>
-        <p:nvSpPr>
-          <p:cNvPr id="4" name="TextBox 3"/>
+          <p:cNvPr id="2" name="TextBox 1"/>
           <p:cNvSpPr txBox="1"/>
           <p:nvPr/>
         </p:nvSpPr>
         <p:spPr>
           <a:xfrm>
-            <a:off x="365760" y="6446520"/>
-            <a:ext cx="8412480" cy="320040"/>
+            <a:off x="731520" y="1371600"/>
+            <a:ext cx="7680960" cy="914400"/>
           </a:xfrm>
           <a:prstGeom prst="rect">
             <a:avLst/>
@@ -3938,20 +4142,67 @@
           <a:noFill/>
         </p:spPr>
         <p:txBody>
-          <a:bodyPr wrap="none">
+          <a:bodyPr wrap="square">
             <a:spAutoFit/>
           </a:bodyPr>
           <a:lstStyle/>
           <a:p>
             <a:pPr algn="ctr">
-              <a:defRPr sz="900">
-                <a:solidFill>
-                  <a:srgbClr val="404040"/>
-                </a:solidFill>
-              </a:defRPr>
-            </a:pPr>
-            <a:r>
-              <a:t>TIC — ENS 2ème année — Module Langues  •  Diapositive 6/10</a:t>
+              <a:defRPr sz="2800" b="1">
+                <a:solidFill>
+                  <a:srgbClr val="FFFFFF"/>
+                </a:solidFill>
+              </a:defRPr>
+            </a:pPr>
+            <a:r>
+              <a:t>🎓 Conclusion</a:t>
+            </a:r>
+          </a:p>
+        </p:txBody>
+      </p:sp>
+      <p:sp>
+        <p:nvSpPr>
+          <p:cNvPr id="3" name="TextBox 2"/>
+          <p:cNvSpPr txBox="1"/>
+          <p:nvPr/>
+        </p:nvSpPr>
+        <p:spPr>
+          <a:xfrm>
+            <a:off x="731520" y="2743200"/>
+            <a:ext cx="7680960" cy="1828800"/>
+          </a:xfrm>
+          <a:prstGeom prst="rect">
+            <a:avLst/>
+          </a:prstGeom>
+          <a:noFill/>
+        </p:spPr>
+        <p:txBody>
+          <a:bodyPr wrap="square">
+            <a:spAutoFit/>
+          </a:bodyPr>
+          <a:lstStyle/>
+          <a:p>
+            <a:pPr algn="ctr">
+              <a:defRPr sz="1800" b="0">
+                <a:solidFill>
+                  <a:srgbClr val="C5D9C7"/>
+                </a:solidFill>
+              </a:defRPr>
+            </a:pPr>
+            <a:r>
+              <a:t>Dr. BELACEL Madani</a:t>
+            </a:r>
+            <a:br/>
+            <a:r>
+              <a:t>Maître de Conférences B</a:t>
+            </a:r>
+            <a:br/>
+            <a:r>
+              <a:t>Université de Mostaganem</a:t>
+            </a:r>
+            <a:br/>
+            <a:r>
+              <a:t>madani.belacel@univ-mosta.dz</a:t>
             </a:r>
           </a:p>
         </p:txBody>
@@ -3961,15 +4212,20 @@
   <p:clrMapOvr>
     <a:masterClrMapping/>
   </p:clrMapOvr>
-  <p:transition spd="med">
-    <p:fade/>
-  </p:transition>
 </p:sld>
 </file>
 
-<file path=ppt/slides/slide7.xml><?xml version="1.0" encoding="utf-8"?>
+<file path=ppt/slides/slide2.xml><?xml version="1.0" encoding="utf-8"?>
 <p:sld xmlns:a="http://schemas.openxmlformats.org/drawingml/2006/main" xmlns:p="http://schemas.openxmlformats.org/presentationml/2006/main" xmlns:r="http://schemas.openxmlformats.org/officeDocument/2006/relationships">
   <p:cSld>
+    <p:bg>
+      <p:bgPr>
+        <a:solidFill>
+          <a:srgbClr val="FFFFFF"/>
+        </a:solidFill>
+        <a:effectLst/>
+      </p:bgPr>
+    </p:bg>
     <p:spTree>
       <p:nvGrpSpPr>
         <p:cNvPr id="1" name=""/>
@@ -3979,83 +4235,14 @@
       <p:grpSpPr/>
       <p:sp>
         <p:nvSpPr>
-          <p:cNvPr id="2" name="Title 1"/>
-          <p:cNvSpPr>
-            <a:spLocks noGrp="1"/>
-          </p:cNvSpPr>
-          <p:nvPr>
-            <p:ph type="title"/>
-          </p:nvPr>
-        </p:nvSpPr>
-        <p:spPr/>
-        <p:txBody>
-          <a:bodyPr/>
-          <a:lstStyle/>
-          <a:p>
-            <a:r>
-              <a:t>Portfolio stage</a:t>
-            </a:r>
-          </a:p>
-        </p:txBody>
-      </p:sp>
-      <p:sp>
-        <p:nvSpPr>
-          <p:cNvPr id="3" name="Content Placeholder 2"/>
-          <p:cNvSpPr>
-            <a:spLocks noGrp="1"/>
-          </p:cNvSpPr>
-          <p:nvPr>
-            <p:ph idx="1"/>
-          </p:nvPr>
-        </p:nvSpPr>
-        <p:spPr/>
-        <p:txBody>
-          <a:bodyPr/>
-          <a:lstStyle/>
-          <a:p>
-            <a:pPr>
-              <a:defRPr sz="2000"/>
-            </a:pPr>
-            <a:r>
-              <a:t>📂 Preuves anonymisées</a:t>
-            </a:r>
-          </a:p>
-          <a:p>
-            <a:pPr>
-              <a:defRPr sz="2000"/>
-            </a:pPr>
-            <a:r>
-              <a:t>📂 Réflexivité Rolfe</a:t>
-            </a:r>
-          </a:p>
-          <a:p>
-            <a:pPr>
-              <a:defRPr sz="2000"/>
-            </a:pPr>
-            <a:r>
-              <a:t>📂 Soutenance 10 min</a:t>
-            </a:r>
-          </a:p>
-          <a:p>
-            <a:pPr>
-              <a:defRPr sz="2000"/>
-            </a:pPr>
-            <a:r>
-              <a:t>📂 Export PDF</a:t>
-            </a:r>
-          </a:p>
-        </p:txBody>
-      </p:sp>
-      <p:sp>
-        <p:nvSpPr>
-          <p:cNvPr id="4" name="TextBox 3"/>
+          <p:cNvPr id="2" name="TextBox 1"/>
           <p:cNvSpPr txBox="1"/>
           <p:nvPr/>
         </p:nvSpPr>
         <p:spPr>
           <a:xfrm>
-            <a:off x="365760" y="6446520"/>
-            <a:ext cx="8412480" cy="320040"/>
+            <a:off x="548640" y="365760"/>
+            <a:ext cx="7772400" cy="640080"/>
           </a:xfrm>
           <a:prstGeom prst="rect">
             <a:avLst/>
@@ -4063,20 +4250,123 @@
           <a:noFill/>
         </p:spPr>
         <p:txBody>
-          <a:bodyPr wrap="none">
+          <a:bodyPr wrap="square">
             <a:spAutoFit/>
           </a:bodyPr>
           <a:lstStyle/>
           <a:p>
-            <a:pPr algn="ctr">
-              <a:defRPr sz="900">
-                <a:solidFill>
-                  <a:srgbClr val="404040"/>
-                </a:solidFill>
-              </a:defRPr>
-            </a:pPr>
-            <a:r>
-              <a:t>TIC — ENS 2ème année — Module Langues  •  Diapositive 7/10</a:t>
+            <a:pPr algn="l">
+              <a:defRPr sz="2600" b="1">
+                <a:solidFill>
+                  <a:srgbClr val="1A5C33"/>
+                </a:solidFill>
+              </a:defRPr>
+            </a:pPr>
+            <a:r>
+              <a:t>🎯 Objectifs pédagogiques</a:t>
+            </a:r>
+          </a:p>
+        </p:txBody>
+      </p:sp>
+      <p:sp>
+        <p:nvSpPr>
+          <p:cNvPr id="3" name="TextBox 2"/>
+          <p:cNvSpPr txBox="1"/>
+          <p:nvPr/>
+        </p:nvSpPr>
+        <p:spPr>
+          <a:xfrm>
+            <a:off x="548640" y="1828800"/>
+            <a:ext cx="7772400" cy="4572000"/>
+          </a:xfrm>
+          <a:prstGeom prst="rect">
+            <a:avLst/>
+          </a:prstGeom>
+          <a:noFill/>
+        </p:spPr>
+        <p:txBody>
+          <a:bodyPr wrap="square">
+            <a:spAutoFit/>
+          </a:bodyPr>
+          <a:lstStyle/>
+          <a:p>
+            <a:pPr>
+              <a:spcAft>
+                <a:spcPts val="600"/>
+              </a:spcAft>
+              <a:defRPr sz="1500">
+                <a:solidFill>
+                  <a:srgbClr val="222222"/>
+                </a:solidFill>
+              </a:defRPr>
+            </a:pPr>
+            <a:r>
+              <a:t>• Savoir :- Définir les TIC et leur évolution</a:t>
+            </a:r>
+            <a:br/>
+            <a:r>
+              <a:t>- Distinguer les dimensions technique, information, communication</a:t>
+            </a:r>
+            <a:br/>
+            <a:r>
+              <a:t>- Comprendre l'intégration pédagogique des TIC en didactique des langues</a:t>
+            </a:r>
+          </a:p>
+          <a:p>
+            <a:pPr>
+              <a:spcAft>
+                <a:spcPts val="600"/>
+              </a:spcAft>
+              <a:defRPr sz="1500">
+                <a:solidFill>
+                  <a:srgbClr val="222222"/>
+                </a:solidFill>
+              </a:defRPr>
+            </a:pPr>
+            <a:r>
+              <a:t>• Savoir-faire :- Utiliser les outils TIC pour concevoir des séquences pédagogiques</a:t>
+            </a:r>
+            <a:br/>
+            <a:r>
+              <a:t>- Évaluer et sélectionner des ressources numériques pour la classe</a:t>
+            </a:r>
+            <a:br/>
+            <a:r>
+              <a:t>- Créer des supports de cours interactifs</a:t>
+            </a:r>
+          </a:p>
+          <a:p>
+            <a:pPr>
+              <a:spcAft>
+                <a:spcPts val="600"/>
+              </a:spcAft>
+              <a:defRPr sz="1500">
+                <a:solidFill>
+                  <a:srgbClr val="222222"/>
+                </a:solidFill>
+              </a:defRPr>
+            </a:pPr>
+            <a:r>
+              <a:t>• Savoir-être :- Adopter une posture de médiateur numérique en classe</a:t>
+            </a:r>
+            <a:br/>
+            <a:r>
+              <a:t>- Développer l'esprit critique face aux outils et ressources</a:t>
+            </a:r>
+          </a:p>
+          <a:p>
+            <a:pPr>
+              <a:spcAft>
+                <a:spcPts val="600"/>
+              </a:spcAft>
+              <a:defRPr sz="1500">
+                <a:solidFill>
+                  <a:srgbClr val="222222"/>
+                </a:solidFill>
+              </a:defRPr>
+            </a:pPr>
+            <a:r>
+              <a:t>• Mode d'évaluation :TD 40 % + Projet pédagogique TIC 30 % + Examen 30 %</a:t>
             </a:r>
           </a:p>
         </p:txBody>
@@ -4086,15 +4376,20 @@
   <p:clrMapOvr>
     <a:masterClrMapping/>
   </p:clrMapOvr>
-  <p:transition spd="med">
-    <p:fade/>
-  </p:transition>
 </p:sld>
 </file>
 
-<file path=ppt/slides/slide8.xml><?xml version="1.0" encoding="utf-8"?>
+<file path=ppt/slides/slide3.xml><?xml version="1.0" encoding="utf-8"?>
 <p:sld xmlns:a="http://schemas.openxmlformats.org/drawingml/2006/main" xmlns:p="http://schemas.openxmlformats.org/presentationml/2006/main" xmlns:r="http://schemas.openxmlformats.org/officeDocument/2006/relationships">
   <p:cSld>
+    <p:bg>
+      <p:bgPr>
+        <a:solidFill>
+          <a:srgbClr val="FFFFFF"/>
+        </a:solidFill>
+        <a:effectLst/>
+      </p:bgPr>
+    </p:bg>
     <p:spTree>
       <p:nvGrpSpPr>
         <p:cNvPr id="1" name=""/>
@@ -4104,83 +4399,14 @@
       <p:grpSpPr/>
       <p:sp>
         <p:nvSpPr>
-          <p:cNvPr id="2" name="Title 1"/>
-          <p:cNvSpPr>
-            <a:spLocks noGrp="1"/>
-          </p:cNvSpPr>
-          <p:nvPr>
-            <p:ph type="title"/>
-          </p:nvPr>
-        </p:nvSpPr>
-        <p:spPr/>
-        <p:txBody>
-          <a:bodyPr/>
-          <a:lstStyle/>
-          <a:p>
-            <a:r>
-              <a:t>Hybride et visio</a:t>
-            </a:r>
-          </a:p>
-        </p:txBody>
-      </p:sp>
-      <p:sp>
-        <p:nvSpPr>
-          <p:cNvPr id="3" name="Content Placeholder 2"/>
-          <p:cNvSpPr>
-            <a:spLocks noGrp="1"/>
-          </p:cNvSpPr>
-          <p:nvPr>
-            <p:ph idx="1"/>
-          </p:nvPr>
-        </p:nvSpPr>
-        <p:spPr/>
-        <p:txBody>
-          <a:bodyPr/>
-          <a:lstStyle/>
-          <a:p>
-            <a:pPr>
-              <a:defRPr sz="2000"/>
-            </a:pPr>
-            <a:r>
-              <a:t>🔄 Teams / BBB</a:t>
-            </a:r>
-          </a:p>
-          <a:p>
-            <a:pPr>
-              <a:defRPr sz="2000"/>
-            </a:pPr>
-            <a:r>
-              <a:t>🔄 Async préparatoire</a:t>
-            </a:r>
-          </a:p>
-          <a:p>
-            <a:pPr>
-              <a:defRPr sz="2000"/>
-            </a:pPr>
-            <a:r>
-              <a:t>🔄 Co-enseignement</a:t>
-            </a:r>
-          </a:p>
-          <a:p>
-            <a:pPr>
-              <a:defRPr sz="2000"/>
-            </a:pPr>
-            <a:r>
-              <a:t>🔄 Netiquette</a:t>
-            </a:r>
-          </a:p>
-        </p:txBody>
-      </p:sp>
-      <p:sp>
-        <p:nvSpPr>
-          <p:cNvPr id="4" name="TextBox 3"/>
+          <p:cNvPr id="2" name="TextBox 1"/>
           <p:cNvSpPr txBox="1"/>
           <p:nvPr/>
         </p:nvSpPr>
         <p:spPr>
           <a:xfrm>
-            <a:off x="365760" y="6446520"/>
-            <a:ext cx="8412480" cy="320040"/>
+            <a:off x="548640" y="365760"/>
+            <a:ext cx="7772400" cy="640080"/>
           </a:xfrm>
           <a:prstGeom prst="rect">
             <a:avLst/>
@@ -4188,20 +4414,193 @@
           <a:noFill/>
         </p:spPr>
         <p:txBody>
-          <a:bodyPr wrap="none">
+          <a:bodyPr wrap="square">
             <a:spAutoFit/>
           </a:bodyPr>
           <a:lstStyle/>
           <a:p>
-            <a:pPr algn="ctr">
-              <a:defRPr sz="900">
-                <a:solidFill>
-                  <a:srgbClr val="404040"/>
-                </a:solidFill>
-              </a:defRPr>
-            </a:pPr>
-            <a:r>
-              <a:t>TIC — ENS 2ème année — Module Langues  •  Diapositive 8/10</a:t>
+            <a:pPr algn="l">
+              <a:defRPr sz="2600" b="1">
+                <a:solidFill>
+                  <a:srgbClr val="1A5C33"/>
+                </a:solidFill>
+              </a:defRPr>
+            </a:pPr>
+            <a:r>
+              <a:t>📋 Plan du cours</a:t>
+            </a:r>
+          </a:p>
+        </p:txBody>
+      </p:sp>
+      <p:sp>
+        <p:nvSpPr>
+          <p:cNvPr id="3" name="TextBox 2"/>
+          <p:cNvSpPr txBox="1"/>
+          <p:nvPr/>
+        </p:nvSpPr>
+        <p:spPr>
+          <a:xfrm>
+            <a:off x="548640" y="1828800"/>
+            <a:ext cx="7772400" cy="4572000"/>
+          </a:xfrm>
+          <a:prstGeom prst="rect">
+            <a:avLst/>
+          </a:prstGeom>
+          <a:noFill/>
+        </p:spPr>
+        <p:txBody>
+          <a:bodyPr wrap="square">
+            <a:spAutoFit/>
+          </a:bodyPr>
+          <a:lstStyle/>
+          <a:p>
+            <a:pPr>
+              <a:spcAft>
+                <a:spcPts val="600"/>
+              </a:spcAft>
+              <a:defRPr sz="1600">
+                <a:solidFill>
+                  <a:srgbClr val="222222"/>
+                </a:solidFill>
+              </a:defRPr>
+            </a:pPr>
+            <a:r>
+              <a:t>• Fiche cours — Plateforme e-learning (Moodle)</a:t>
+            </a:r>
+          </a:p>
+          <a:p>
+            <a:pPr>
+              <a:spcAft>
+                <a:spcPts val="600"/>
+              </a:spcAft>
+              <a:defRPr sz="1600">
+                <a:solidFill>
+                  <a:srgbClr val="222222"/>
+                </a:solidFill>
+              </a:defRPr>
+            </a:pPr>
+            <a:r>
+              <a:t>• Objectifs de l'enseignement</a:t>
+            </a:r>
+          </a:p>
+          <a:p>
+            <a:pPr>
+              <a:spcAft>
+                <a:spcPts val="600"/>
+              </a:spcAft>
+              <a:defRPr sz="1600">
+                <a:solidFill>
+                  <a:srgbClr val="222222"/>
+                </a:solidFill>
+              </a:defRPr>
+            </a:pPr>
+            <a:r>
+              <a:t>• Plan du Cours</a:t>
+            </a:r>
+          </a:p>
+          <a:p>
+            <a:pPr>
+              <a:spcAft>
+                <a:spcPts val="600"/>
+              </a:spcAft>
+              <a:defRPr sz="1600">
+                <a:solidFill>
+                  <a:srgbClr val="222222"/>
+                </a:solidFill>
+              </a:defRPr>
+            </a:pPr>
+            <a:r>
+              <a:t>• 1. Définition et Évolution des TIC(10 min)</a:t>
+            </a:r>
+          </a:p>
+          <a:p>
+            <a:pPr>
+              <a:spcAft>
+                <a:spcPts val="600"/>
+              </a:spcAft>
+              <a:defRPr sz="1600">
+                <a:solidFill>
+                  <a:srgbClr val="222222"/>
+                </a:solidFill>
+              </a:defRPr>
+            </a:pPr>
+            <a:r>
+              <a:t>• 3. TIC et Pédagogie(20 min)</a:t>
+            </a:r>
+          </a:p>
+          <a:p>
+            <a:pPr>
+              <a:spcAft>
+                <a:spcPts val="600"/>
+              </a:spcAft>
+              <a:defRPr sz="1600">
+                <a:solidFill>
+                  <a:srgbClr val="222222"/>
+                </a:solidFill>
+              </a:defRPr>
+            </a:pPr>
+            <a:r>
+              <a:t>• 4. Modèle SAMR(15 min)</a:t>
+            </a:r>
+          </a:p>
+          <a:p>
+            <a:pPr>
+              <a:spcAft>
+                <a:spcPts val="600"/>
+              </a:spcAft>
+              <a:defRPr sz="1600">
+                <a:solidFill>
+                  <a:srgbClr val="222222"/>
+                </a:solidFill>
+              </a:defRPr>
+            </a:pPr>
+            <a:r>
+              <a:t>• 7. Éthique et Sécurité(10 min)</a:t>
+            </a:r>
+          </a:p>
+          <a:p>
+            <a:pPr>
+              <a:spcAft>
+                <a:spcPts val="600"/>
+              </a:spcAft>
+              <a:defRPr sz="1600">
+                <a:solidFill>
+                  <a:srgbClr val="222222"/>
+                </a:solidFill>
+              </a:defRPr>
+            </a:pPr>
+            <a:r>
+              <a:t>• 8. Conclusion(5 min)</a:t>
+            </a:r>
+          </a:p>
+          <a:p>
+            <a:pPr>
+              <a:spcAft>
+                <a:spcPts val="600"/>
+              </a:spcAft>
+              <a:defRPr sz="1600">
+                <a:solidFill>
+                  <a:srgbClr val="222222"/>
+                </a:solidFill>
+              </a:defRPr>
+            </a:pPr>
+            <a:r>
+              <a:t>• Fiche cours — Plateforme e-learning (Moodle)</a:t>
+            </a:r>
+          </a:p>
+          <a:p>
+            <a:pPr>
+              <a:spcAft>
+                <a:spcPts val="600"/>
+              </a:spcAft>
+              <a:defRPr sz="1600">
+                <a:solidFill>
+                  <a:srgbClr val="222222"/>
+                </a:solidFill>
+              </a:defRPr>
+            </a:pPr>
+            <a:r>
+              <a:t>• Objectifs de l'enseignement</a:t>
             </a:r>
           </a:p>
         </p:txBody>
@@ -4211,15 +4610,20 @@
   <p:clrMapOvr>
     <a:masterClrMapping/>
   </p:clrMapOvr>
-  <p:transition spd="med">
-    <p:fade/>
-  </p:transition>
 </p:sld>
 </file>
 
-<file path=ppt/slides/slide9.xml><?xml version="1.0" encoding="utf-8"?>
+<file path=ppt/slides/slide4.xml><?xml version="1.0" encoding="utf-8"?>
 <p:sld xmlns:a="http://schemas.openxmlformats.org/drawingml/2006/main" xmlns:p="http://schemas.openxmlformats.org/presentationml/2006/main" xmlns:r="http://schemas.openxmlformats.org/officeDocument/2006/relationships">
   <p:cSld>
+    <p:bg>
+      <p:bgPr>
+        <a:solidFill>
+          <a:srgbClr val="FFFFFF"/>
+        </a:solidFill>
+        <a:effectLst/>
+      </p:bgPr>
+    </p:bg>
     <p:spTree>
       <p:nvGrpSpPr>
         <p:cNvPr id="1" name=""/>
@@ -4229,83 +4633,57 @@
       <p:grpSpPr/>
       <p:sp>
         <p:nvSpPr>
-          <p:cNvPr id="2" name="Title 1"/>
-          <p:cNvSpPr>
-            <a:spLocks noGrp="1"/>
-          </p:cNvSpPr>
-          <p:nvPr>
-            <p:ph type="title"/>
-          </p:nvPr>
-        </p:nvSpPr>
-        <p:spPr/>
-        <p:txBody>
-          <a:bodyPr/>
-          <a:lstStyle/>
-          <a:p>
-            <a:r>
-              <a:t>IA et charte</a:t>
-            </a:r>
-          </a:p>
-        </p:txBody>
-      </p:sp>
-      <p:sp>
-        <p:nvSpPr>
-          <p:cNvPr id="3" name="Content Placeholder 2"/>
-          <p:cNvSpPr>
-            <a:spLocks noGrp="1"/>
-          </p:cNvSpPr>
-          <p:nvPr>
-            <p:ph idx="1"/>
-          </p:nvPr>
-        </p:nvSpPr>
-        <p:spPr/>
-        <p:txBody>
-          <a:bodyPr/>
-          <a:lstStyle/>
-          <a:p>
-            <a:pPr>
-              <a:defRPr sz="2000"/>
-            </a:pPr>
-            <a:r>
-              <a:t>🤖 Usages encadrés</a:t>
-            </a:r>
-          </a:p>
-          <a:p>
-            <a:pPr>
-              <a:defRPr sz="2000"/>
-            </a:pPr>
-            <a:r>
-              <a:t>🤖 Traduction auto.</a:t>
-            </a:r>
-          </a:p>
-          <a:p>
-            <a:pPr>
-              <a:defRPr sz="2000"/>
-            </a:pPr>
-            <a:r>
-              <a:t>🤖 Formation élèves</a:t>
-            </a:r>
-          </a:p>
-          <a:p>
-            <a:pPr>
-              <a:defRPr sz="2000"/>
-            </a:pPr>
-            <a:r>
-              <a:t>🤖 Sanctions éducatives</a:t>
-            </a:r>
-          </a:p>
-        </p:txBody>
-      </p:sp>
-      <p:sp>
-        <p:nvSpPr>
-          <p:cNvPr id="4" name="TextBox 3"/>
+          <p:cNvPr id="2" name="Rectangle 1"/>
+          <p:cNvSpPr/>
+          <p:nvPr/>
+        </p:nvSpPr>
+        <p:spPr>
+          <a:xfrm>
+            <a:off x="0" y="0"/>
+            <a:ext cx="109728" cy="6858000"/>
+          </a:xfrm>
+          <a:prstGeom prst="rect">
+            <a:avLst/>
+          </a:prstGeom>
+          <a:solidFill>
+            <a:srgbClr val="2C6E49"/>
+          </a:solidFill>
+          <a:ln>
+            <a:noFill/>
+          </a:ln>
+        </p:spPr>
+        <p:style>
+          <a:lnRef idx="1">
+            <a:schemeClr val="accent1"/>
+          </a:lnRef>
+          <a:fillRef idx="3">
+            <a:schemeClr val="accent1"/>
+          </a:fillRef>
+          <a:effectRef idx="2">
+            <a:schemeClr val="accent1"/>
+          </a:effectRef>
+          <a:fontRef idx="minor">
+            <a:schemeClr val="lt1"/>
+          </a:fontRef>
+        </p:style>
+        <p:txBody>
+          <a:bodyPr rtlCol="0" anchor="ctr"/>
+          <a:lstStyle/>
+          <a:p>
+            <a:pPr algn="ctr"/>
+          </a:p>
+        </p:txBody>
+      </p:sp>
+      <p:sp>
+        <p:nvSpPr>
+          <p:cNvPr id="3" name="TextBox 2"/>
           <p:cNvSpPr txBox="1"/>
           <p:nvPr/>
         </p:nvSpPr>
         <p:spPr>
           <a:xfrm>
-            <a:off x="365760" y="6446520"/>
-            <a:ext cx="8412480" cy="320040"/>
+            <a:off x="457200" y="365760"/>
+            <a:ext cx="8229600" cy="640080"/>
           </a:xfrm>
           <a:prstGeom prst="rect">
             <a:avLst/>
@@ -4313,20 +4691,73 @@
           <a:noFill/>
         </p:spPr>
         <p:txBody>
-          <a:bodyPr wrap="none">
+          <a:bodyPr wrap="square">
             <a:spAutoFit/>
           </a:bodyPr>
           <a:lstStyle/>
           <a:p>
-            <a:pPr algn="ctr">
-              <a:defRPr sz="900">
-                <a:solidFill>
-                  <a:srgbClr val="404040"/>
-                </a:solidFill>
-              </a:defRPr>
-            </a:pPr>
-            <a:r>
-              <a:t>TIC — ENS 2ème année — Module Langues  •  Diapositive 9/10</a:t>
+            <a:pPr algn="l">
+              <a:defRPr sz="2200" b="1">
+                <a:solidFill>
+                  <a:srgbClr val="1A5C33"/>
+                </a:solidFill>
+              </a:defRPr>
+            </a:pPr>
+            <a:r>
+              <a:t>Fiche cours — Plateforme e-learning (Moodle)</a:t>
+            </a:r>
+          </a:p>
+        </p:txBody>
+      </p:sp>
+      <p:sp>
+        <p:nvSpPr>
+          <p:cNvPr id="4" name="TextBox 3"/>
+          <p:cNvSpPr txBox="1"/>
+          <p:nvPr/>
+        </p:nvSpPr>
+        <p:spPr>
+          <a:xfrm>
+            <a:off x="457200" y="1371600"/>
+            <a:ext cx="7772400" cy="4572000"/>
+          </a:xfrm>
+          <a:prstGeom prst="rect">
+            <a:avLst/>
+          </a:prstGeom>
+          <a:noFill/>
+        </p:spPr>
+        <p:txBody>
+          <a:bodyPr wrap="square">
+            <a:spAutoFit/>
+          </a:bodyPr>
+          <a:lstStyle/>
+          <a:p>
+            <a:pPr>
+              <a:spcAft>
+                <a:spcPts val="600"/>
+              </a:spcAft>
+              <a:defRPr sz="1400">
+                <a:solidFill>
+                  <a:srgbClr val="222222"/>
+                </a:solidFill>
+              </a:defRPr>
+            </a:pPr>
+            <a:r>
+              <a:t>• Public visé :Étudiants ENS — futurs enseignants de langues</a:t>
+            </a:r>
+          </a:p>
+          <a:p>
+            <a:pPr>
+              <a:spcAft>
+                <a:spcPts val="600"/>
+              </a:spcAft>
+              <a:defRPr sz="1400">
+                <a:solidFill>
+                  <a:srgbClr val="222222"/>
+                </a:solidFill>
+              </a:defRPr>
+            </a:pPr>
+            <a:r>
+              <a:t>• Compétences pré-requises :Notions de base en informatique (L1 validée)</a:t>
             </a:r>
           </a:p>
         </p:txBody>
@@ -4336,9 +4767,970 @@
   <p:clrMapOvr>
     <a:masterClrMapping/>
   </p:clrMapOvr>
-  <p:transition spd="med">
-    <p:fade/>
-  </p:transition>
+</p:sld>
+</file>
+
+<file path=ppt/slides/slide5.xml><?xml version="1.0" encoding="utf-8"?>
+<p:sld xmlns:a="http://schemas.openxmlformats.org/drawingml/2006/main" xmlns:p="http://schemas.openxmlformats.org/presentationml/2006/main" xmlns:r="http://schemas.openxmlformats.org/officeDocument/2006/relationships">
+  <p:cSld>
+    <p:bg>
+      <p:bgPr>
+        <a:solidFill>
+          <a:srgbClr val="FFFFFF"/>
+        </a:solidFill>
+        <a:effectLst/>
+      </p:bgPr>
+    </p:bg>
+    <p:spTree>
+      <p:nvGrpSpPr>
+        <p:cNvPr id="1" name=""/>
+        <p:cNvGrpSpPr/>
+        <p:nvPr/>
+      </p:nvGrpSpPr>
+      <p:grpSpPr/>
+      <p:sp>
+        <p:nvSpPr>
+          <p:cNvPr id="2" name="Rectangle 1"/>
+          <p:cNvSpPr/>
+          <p:nvPr/>
+        </p:nvSpPr>
+        <p:spPr>
+          <a:xfrm>
+            <a:off x="0" y="0"/>
+            <a:ext cx="109728" cy="6858000"/>
+          </a:xfrm>
+          <a:prstGeom prst="rect">
+            <a:avLst/>
+          </a:prstGeom>
+          <a:solidFill>
+            <a:srgbClr val="2C6E49"/>
+          </a:solidFill>
+          <a:ln>
+            <a:noFill/>
+          </a:ln>
+        </p:spPr>
+        <p:style>
+          <a:lnRef idx="1">
+            <a:schemeClr val="accent1"/>
+          </a:lnRef>
+          <a:fillRef idx="3">
+            <a:schemeClr val="accent1"/>
+          </a:fillRef>
+          <a:effectRef idx="2">
+            <a:schemeClr val="accent1"/>
+          </a:effectRef>
+          <a:fontRef idx="minor">
+            <a:schemeClr val="lt1"/>
+          </a:fontRef>
+        </p:style>
+        <p:txBody>
+          <a:bodyPr rtlCol="0" anchor="ctr"/>
+          <a:lstStyle/>
+          <a:p>
+            <a:pPr algn="ctr"/>
+          </a:p>
+        </p:txBody>
+      </p:sp>
+      <p:sp>
+        <p:nvSpPr>
+          <p:cNvPr id="3" name="TextBox 2"/>
+          <p:cNvSpPr txBox="1"/>
+          <p:nvPr/>
+        </p:nvSpPr>
+        <p:spPr>
+          <a:xfrm>
+            <a:off x="457200" y="365760"/>
+            <a:ext cx="8229600" cy="640080"/>
+          </a:xfrm>
+          <a:prstGeom prst="rect">
+            <a:avLst/>
+          </a:prstGeom>
+          <a:noFill/>
+        </p:spPr>
+        <p:txBody>
+          <a:bodyPr wrap="square">
+            <a:spAutoFit/>
+          </a:bodyPr>
+          <a:lstStyle/>
+          <a:p>
+            <a:pPr algn="l">
+              <a:defRPr sz="2200" b="1">
+                <a:solidFill>
+                  <a:srgbClr val="1A5C33"/>
+                </a:solidFill>
+              </a:defRPr>
+            </a:pPr>
+            <a:r>
+              <a:t>Objectifs de l'enseignement</a:t>
+            </a:r>
+          </a:p>
+        </p:txBody>
+      </p:sp>
+      <p:sp>
+        <p:nvSpPr>
+          <p:cNvPr id="4" name="TextBox 3"/>
+          <p:cNvSpPr txBox="1"/>
+          <p:nvPr/>
+        </p:nvSpPr>
+        <p:spPr>
+          <a:xfrm>
+            <a:off x="457200" y="1371600"/>
+            <a:ext cx="7772400" cy="4572000"/>
+          </a:xfrm>
+          <a:prstGeom prst="rect">
+            <a:avLst/>
+          </a:prstGeom>
+          <a:noFill/>
+        </p:spPr>
+        <p:txBody>
+          <a:bodyPr wrap="square">
+            <a:spAutoFit/>
+          </a:bodyPr>
+          <a:lstStyle/>
+          <a:p>
+            <a:pPr>
+              <a:spcAft>
+                <a:spcPts val="600"/>
+              </a:spcAft>
+              <a:defRPr sz="1400">
+                <a:solidFill>
+                  <a:srgbClr val="222222"/>
+                </a:solidFill>
+              </a:defRPr>
+            </a:pPr>
+            <a:r>
+              <a:t>• Savoir :- Définir les TIC et leur évolution</a:t>
+            </a:r>
+            <a:br/>
+            <a:r>
+              <a:t>- Distinguer les dimensions technique, information, communication</a:t>
+            </a:r>
+            <a:br/>
+            <a:r>
+              <a:t>- Comprendre l'intégration pédagogique des TIC en didactique des langues</a:t>
+            </a:r>
+          </a:p>
+          <a:p>
+            <a:pPr>
+              <a:spcAft>
+                <a:spcPts val="600"/>
+              </a:spcAft>
+              <a:defRPr sz="1400">
+                <a:solidFill>
+                  <a:srgbClr val="222222"/>
+                </a:solidFill>
+              </a:defRPr>
+            </a:pPr>
+            <a:r>
+              <a:t>• Savoir-faire :- Utiliser les outils TIC pour concevoir des séquences pédagogiques</a:t>
+            </a:r>
+            <a:br/>
+            <a:r>
+              <a:t>- Évaluer et sélectionner des ressources numériques pour la classe</a:t>
+            </a:r>
+            <a:br/>
+            <a:r>
+              <a:t>- Créer des supports de cours interactifs</a:t>
+            </a:r>
+          </a:p>
+          <a:p>
+            <a:pPr>
+              <a:spcAft>
+                <a:spcPts val="600"/>
+              </a:spcAft>
+              <a:defRPr sz="1400">
+                <a:solidFill>
+                  <a:srgbClr val="222222"/>
+                </a:solidFill>
+              </a:defRPr>
+            </a:pPr>
+            <a:r>
+              <a:t>• Savoir-être :- Adopter une posture de médiateur numérique en classe</a:t>
+            </a:r>
+            <a:br/>
+            <a:r>
+              <a:t>- Développer l'esprit critique face aux outils et ressources</a:t>
+            </a:r>
+          </a:p>
+          <a:p>
+            <a:pPr>
+              <a:spcAft>
+                <a:spcPts val="600"/>
+              </a:spcAft>
+              <a:defRPr sz="1400">
+                <a:solidFill>
+                  <a:srgbClr val="222222"/>
+                </a:solidFill>
+              </a:defRPr>
+            </a:pPr>
+            <a:r>
+              <a:t>• Mode d'évaluation :TD 40 % + Projet pédagogique TIC 30 % + Examen 30 %</a:t>
+            </a:r>
+          </a:p>
+        </p:txBody>
+      </p:sp>
+    </p:spTree>
+  </p:cSld>
+  <p:clrMapOvr>
+    <a:masterClrMapping/>
+  </p:clrMapOvr>
+</p:sld>
+</file>
+
+<file path=ppt/slides/slide6.xml><?xml version="1.0" encoding="utf-8"?>
+<p:sld xmlns:a="http://schemas.openxmlformats.org/drawingml/2006/main" xmlns:p="http://schemas.openxmlformats.org/presentationml/2006/main" xmlns:r="http://schemas.openxmlformats.org/officeDocument/2006/relationships">
+  <p:cSld>
+    <p:bg>
+      <p:bgPr>
+        <a:solidFill>
+          <a:srgbClr val="FFFFFF"/>
+        </a:solidFill>
+        <a:effectLst/>
+      </p:bgPr>
+    </p:bg>
+    <p:spTree>
+      <p:nvGrpSpPr>
+        <p:cNvPr id="1" name=""/>
+        <p:cNvGrpSpPr/>
+        <p:nvPr/>
+      </p:nvGrpSpPr>
+      <p:grpSpPr/>
+      <p:sp>
+        <p:nvSpPr>
+          <p:cNvPr id="2" name="Rectangle 1"/>
+          <p:cNvSpPr/>
+          <p:nvPr/>
+        </p:nvSpPr>
+        <p:spPr>
+          <a:xfrm>
+            <a:off x="0" y="0"/>
+            <a:ext cx="109728" cy="6858000"/>
+          </a:xfrm>
+          <a:prstGeom prst="rect">
+            <a:avLst/>
+          </a:prstGeom>
+          <a:solidFill>
+            <a:srgbClr val="2C6E49"/>
+          </a:solidFill>
+          <a:ln>
+            <a:noFill/>
+          </a:ln>
+        </p:spPr>
+        <p:style>
+          <a:lnRef idx="1">
+            <a:schemeClr val="accent1"/>
+          </a:lnRef>
+          <a:fillRef idx="3">
+            <a:schemeClr val="accent1"/>
+          </a:fillRef>
+          <a:effectRef idx="2">
+            <a:schemeClr val="accent1"/>
+          </a:effectRef>
+          <a:fontRef idx="minor">
+            <a:schemeClr val="lt1"/>
+          </a:fontRef>
+        </p:style>
+        <p:txBody>
+          <a:bodyPr rtlCol="0" anchor="ctr"/>
+          <a:lstStyle/>
+          <a:p>
+            <a:pPr algn="ctr"/>
+          </a:p>
+        </p:txBody>
+      </p:sp>
+      <p:sp>
+        <p:nvSpPr>
+          <p:cNvPr id="3" name="TextBox 2"/>
+          <p:cNvSpPr txBox="1"/>
+          <p:nvPr/>
+        </p:nvSpPr>
+        <p:spPr>
+          <a:xfrm>
+            <a:off x="457200" y="365760"/>
+            <a:ext cx="8229600" cy="640080"/>
+          </a:xfrm>
+          <a:prstGeom prst="rect">
+            <a:avLst/>
+          </a:prstGeom>
+          <a:noFill/>
+        </p:spPr>
+        <p:txBody>
+          <a:bodyPr wrap="square">
+            <a:spAutoFit/>
+          </a:bodyPr>
+          <a:lstStyle/>
+          <a:p>
+            <a:pPr algn="l">
+              <a:defRPr sz="2200" b="1">
+                <a:solidFill>
+                  <a:srgbClr val="1A5C33"/>
+                </a:solidFill>
+              </a:defRPr>
+            </a:pPr>
+            <a:r>
+              <a:t>Plan du Cours</a:t>
+            </a:r>
+          </a:p>
+        </p:txBody>
+      </p:sp>
+      <p:sp>
+        <p:nvSpPr>
+          <p:cNvPr id="4" name="TextBox 3"/>
+          <p:cNvSpPr txBox="1"/>
+          <p:nvPr/>
+        </p:nvSpPr>
+        <p:spPr>
+          <a:xfrm>
+            <a:off x="457200" y="1371600"/>
+            <a:ext cx="7772400" cy="4572000"/>
+          </a:xfrm>
+          <a:prstGeom prst="rect">
+            <a:avLst/>
+          </a:prstGeom>
+          <a:noFill/>
+        </p:spPr>
+        <p:txBody>
+          <a:bodyPr wrap="square">
+            <a:spAutoFit/>
+          </a:bodyPr>
+          <a:lstStyle/>
+          <a:p>
+            <a:pPr>
+              <a:spcAft>
+                <a:spcPts val="600"/>
+              </a:spcAft>
+              <a:defRPr sz="1400">
+                <a:solidFill>
+                  <a:srgbClr val="222222"/>
+                </a:solidFill>
+              </a:defRPr>
+            </a:pPr>
+            <a:r>
+              <a:t>• Définition et évolution des TIC</a:t>
+            </a:r>
+          </a:p>
+          <a:p>
+            <a:pPr>
+              <a:spcAft>
+                <a:spcPts val="600"/>
+              </a:spcAft>
+              <a:defRPr sz="1400">
+                <a:solidFill>
+                  <a:srgbClr val="222222"/>
+                </a:solidFill>
+              </a:defRPr>
+            </a:pPr>
+            <a:r>
+              <a:t>• Les trois dimensions des TIC</a:t>
+            </a:r>
+          </a:p>
+          <a:p>
+            <a:pPr>
+              <a:spcAft>
+                <a:spcPts val="600"/>
+              </a:spcAft>
+              <a:defRPr sz="1400">
+                <a:solidFill>
+                  <a:srgbClr val="222222"/>
+                </a:solidFill>
+              </a:defRPr>
+            </a:pPr>
+            <a:r>
+              <a:t>• TIC et pédagogie : intégration en classe de langues</a:t>
+            </a:r>
+          </a:p>
+          <a:p>
+            <a:pPr>
+              <a:spcAft>
+                <a:spcPts val="600"/>
+              </a:spcAft>
+              <a:defRPr sz="1400">
+                <a:solidFill>
+                  <a:srgbClr val="222222"/>
+                </a:solidFill>
+              </a:defRPr>
+            </a:pPr>
+            <a:r>
+              <a:t>• Modèle SAMR et Taxonomie de Bloom numérique</a:t>
+            </a:r>
+          </a:p>
+          <a:p>
+            <a:pPr>
+              <a:spcAft>
+                <a:spcPts val="600"/>
+              </a:spcAft>
+              <a:defRPr sz="1400">
+                <a:solidFill>
+                  <a:srgbClr val="222222"/>
+                </a:solidFill>
+              </a:defRPr>
+            </a:pPr>
+            <a:r>
+              <a:t>• Outils TIC pour l'enseignant de langues</a:t>
+            </a:r>
+          </a:p>
+          <a:p>
+            <a:pPr>
+              <a:spcAft>
+                <a:spcPts val="600"/>
+              </a:spcAft>
+              <a:defRPr sz="1400">
+                <a:solidFill>
+                  <a:srgbClr val="222222"/>
+                </a:solidFill>
+              </a:defRPr>
+            </a:pPr>
+            <a:r>
+              <a:t>• Compétences numériques du référentiel enseignant</a:t>
+            </a:r>
+          </a:p>
+          <a:p>
+            <a:pPr>
+              <a:spcAft>
+                <a:spcPts val="600"/>
+              </a:spcAft>
+              <a:defRPr sz="1400">
+                <a:solidFill>
+                  <a:srgbClr val="222222"/>
+                </a:solidFill>
+              </a:defRPr>
+            </a:pPr>
+            <a:r>
+              <a:t>• Éthique et sécurité en contexte pédagogique</a:t>
+            </a:r>
+          </a:p>
+          <a:p>
+            <a:pPr>
+              <a:spcAft>
+                <a:spcPts val="600"/>
+              </a:spcAft>
+              <a:defRPr sz="1400">
+                <a:solidFill>
+                  <a:srgbClr val="222222"/>
+                </a:solidFill>
+              </a:defRPr>
+            </a:pPr>
+            <a:r>
+              <a:t>• Conclusion et transition</a:t>
+            </a:r>
+          </a:p>
+        </p:txBody>
+      </p:sp>
+    </p:spTree>
+  </p:cSld>
+  <p:clrMapOvr>
+    <a:masterClrMapping/>
+  </p:clrMapOvr>
+</p:sld>
+</file>
+
+<file path=ppt/slides/slide7.xml><?xml version="1.0" encoding="utf-8"?>
+<p:sld xmlns:a="http://schemas.openxmlformats.org/drawingml/2006/main" xmlns:p="http://schemas.openxmlformats.org/presentationml/2006/main" xmlns:r="http://schemas.openxmlformats.org/officeDocument/2006/relationships">
+  <p:cSld>
+    <p:bg>
+      <p:bgPr>
+        <a:solidFill>
+          <a:srgbClr val="FFFFFF"/>
+        </a:solidFill>
+        <a:effectLst/>
+      </p:bgPr>
+    </p:bg>
+    <p:spTree>
+      <p:nvGrpSpPr>
+        <p:cNvPr id="1" name=""/>
+        <p:cNvGrpSpPr/>
+        <p:nvPr/>
+      </p:nvGrpSpPr>
+      <p:grpSpPr/>
+      <p:sp>
+        <p:nvSpPr>
+          <p:cNvPr id="2" name="Rectangle 1"/>
+          <p:cNvSpPr/>
+          <p:nvPr/>
+        </p:nvSpPr>
+        <p:spPr>
+          <a:xfrm>
+            <a:off x="0" y="0"/>
+            <a:ext cx="109728" cy="6858000"/>
+          </a:xfrm>
+          <a:prstGeom prst="rect">
+            <a:avLst/>
+          </a:prstGeom>
+          <a:solidFill>
+            <a:srgbClr val="2C6E49"/>
+          </a:solidFill>
+          <a:ln>
+            <a:noFill/>
+          </a:ln>
+        </p:spPr>
+        <p:style>
+          <a:lnRef idx="1">
+            <a:schemeClr val="accent1"/>
+          </a:lnRef>
+          <a:fillRef idx="3">
+            <a:schemeClr val="accent1"/>
+          </a:fillRef>
+          <a:effectRef idx="2">
+            <a:schemeClr val="accent1"/>
+          </a:effectRef>
+          <a:fontRef idx="minor">
+            <a:schemeClr val="lt1"/>
+          </a:fontRef>
+        </p:style>
+        <p:txBody>
+          <a:bodyPr rtlCol="0" anchor="ctr"/>
+          <a:lstStyle/>
+          <a:p>
+            <a:pPr algn="ctr"/>
+          </a:p>
+        </p:txBody>
+      </p:sp>
+      <p:sp>
+        <p:nvSpPr>
+          <p:cNvPr id="3" name="TextBox 2"/>
+          <p:cNvSpPr txBox="1"/>
+          <p:nvPr/>
+        </p:nvSpPr>
+        <p:spPr>
+          <a:xfrm>
+            <a:off x="457200" y="365760"/>
+            <a:ext cx="8229600" cy="640080"/>
+          </a:xfrm>
+          <a:prstGeom prst="rect">
+            <a:avLst/>
+          </a:prstGeom>
+          <a:noFill/>
+        </p:spPr>
+        <p:txBody>
+          <a:bodyPr wrap="square">
+            <a:spAutoFit/>
+          </a:bodyPr>
+          <a:lstStyle/>
+          <a:p>
+            <a:pPr algn="l">
+              <a:defRPr sz="2200" b="1">
+                <a:solidFill>
+                  <a:srgbClr val="1A5C33"/>
+                </a:solidFill>
+              </a:defRPr>
+            </a:pPr>
+            <a:r>
+              <a:t>1. Définition et Évolution des TIC(10 min)</a:t>
+            </a:r>
+          </a:p>
+        </p:txBody>
+      </p:sp>
+      <p:sp>
+        <p:nvSpPr>
+          <p:cNvPr id="4" name="TextBox 3"/>
+          <p:cNvSpPr txBox="1"/>
+          <p:nvPr/>
+        </p:nvSpPr>
+        <p:spPr>
+          <a:xfrm>
+            <a:off x="457200" y="1371600"/>
+            <a:ext cx="7772400" cy="4572000"/>
+          </a:xfrm>
+          <a:prstGeom prst="rect">
+            <a:avLst/>
+          </a:prstGeom>
+          <a:noFill/>
+        </p:spPr>
+        <p:txBody>
+          <a:bodyPr wrap="square">
+            <a:spAutoFit/>
+          </a:bodyPr>
+          <a:lstStyle/>
+          <a:p>
+            <a:pPr>
+              <a:spcAft>
+                <a:spcPts val="600"/>
+              </a:spcAft>
+              <a:defRPr sz="1400">
+                <a:solidFill>
+                  <a:srgbClr val="222222"/>
+                </a:solidFill>
+              </a:defRPr>
+            </a:pPr>
+            <a:r>
+              <a:t>• LesTechniques de l'Information et de la Communication(TIC) englobent les outils et systèmes numériques permettant de créer, traiter, stocker, transmettre et partager l'information.</a:t>
+            </a:r>
+          </a:p>
+          <a:p>
+            <a:pPr>
+              <a:spcAft>
+                <a:spcPts val="600"/>
+              </a:spcAft>
+              <a:defRPr sz="1400">
+                <a:solidFill>
+                  <a:srgbClr val="222222"/>
+                </a:solidFill>
+              </a:defRPr>
+            </a:pPr>
+            <a:r>
+              <a:t>• Évolution :NTIC (1990-2005) → TIC (2005-présent) → IA et EdTech (2020+).</a:t>
+            </a:r>
+          </a:p>
+          <a:p>
+            <a:pPr>
+              <a:spcAft>
+                <a:spcPts val="600"/>
+              </a:spcAft>
+              <a:defRPr sz="1400">
+                <a:solidFill>
+                  <a:srgbClr val="222222"/>
+                </a:solidFill>
+              </a:defRPr>
+            </a:pPr>
+            <a:r>
+              <a:t>• Pour le futur enseignant :Les TIC ne sont pas seulement des outils personnels mais desinstruments pédagogiquesà intégrer dans sa pratique.</a:t>
+            </a:r>
+          </a:p>
+        </p:txBody>
+      </p:sp>
+    </p:spTree>
+  </p:cSld>
+  <p:clrMapOvr>
+    <a:masterClrMapping/>
+  </p:clrMapOvr>
+</p:sld>
+</file>
+
+<file path=ppt/slides/slide8.xml><?xml version="1.0" encoding="utf-8"?>
+<p:sld xmlns:a="http://schemas.openxmlformats.org/drawingml/2006/main" xmlns:p="http://schemas.openxmlformats.org/presentationml/2006/main" xmlns:r="http://schemas.openxmlformats.org/officeDocument/2006/relationships">
+  <p:cSld>
+    <p:bg>
+      <p:bgPr>
+        <a:solidFill>
+          <a:srgbClr val="FFFFFF"/>
+        </a:solidFill>
+        <a:effectLst/>
+      </p:bgPr>
+    </p:bg>
+    <p:spTree>
+      <p:nvGrpSpPr>
+        <p:cNvPr id="1" name=""/>
+        <p:cNvGrpSpPr/>
+        <p:nvPr/>
+      </p:nvGrpSpPr>
+      <p:grpSpPr/>
+      <p:sp>
+        <p:nvSpPr>
+          <p:cNvPr id="2" name="Rectangle 1"/>
+          <p:cNvSpPr/>
+          <p:nvPr/>
+        </p:nvSpPr>
+        <p:spPr>
+          <a:xfrm>
+            <a:off x="0" y="0"/>
+            <a:ext cx="109728" cy="6858000"/>
+          </a:xfrm>
+          <a:prstGeom prst="rect">
+            <a:avLst/>
+          </a:prstGeom>
+          <a:solidFill>
+            <a:srgbClr val="2C6E49"/>
+          </a:solidFill>
+          <a:ln>
+            <a:noFill/>
+          </a:ln>
+        </p:spPr>
+        <p:style>
+          <a:lnRef idx="1">
+            <a:schemeClr val="accent1"/>
+          </a:lnRef>
+          <a:fillRef idx="3">
+            <a:schemeClr val="accent1"/>
+          </a:fillRef>
+          <a:effectRef idx="2">
+            <a:schemeClr val="accent1"/>
+          </a:effectRef>
+          <a:fontRef idx="minor">
+            <a:schemeClr val="lt1"/>
+          </a:fontRef>
+        </p:style>
+        <p:txBody>
+          <a:bodyPr rtlCol="0" anchor="ctr"/>
+          <a:lstStyle/>
+          <a:p>
+            <a:pPr algn="ctr"/>
+          </a:p>
+        </p:txBody>
+      </p:sp>
+      <p:sp>
+        <p:nvSpPr>
+          <p:cNvPr id="3" name="TextBox 2"/>
+          <p:cNvSpPr txBox="1"/>
+          <p:nvPr/>
+        </p:nvSpPr>
+        <p:spPr>
+          <a:xfrm>
+            <a:off x="457200" y="365760"/>
+            <a:ext cx="8229600" cy="640080"/>
+          </a:xfrm>
+          <a:prstGeom prst="rect">
+            <a:avLst/>
+          </a:prstGeom>
+          <a:noFill/>
+        </p:spPr>
+        <p:txBody>
+          <a:bodyPr wrap="square">
+            <a:spAutoFit/>
+          </a:bodyPr>
+          <a:lstStyle/>
+          <a:p>
+            <a:pPr algn="l">
+              <a:defRPr sz="2200" b="1">
+                <a:solidFill>
+                  <a:srgbClr val="1A5C33"/>
+                </a:solidFill>
+              </a:defRPr>
+            </a:pPr>
+            <a:r>
+              <a:t>3. TIC et Pédagogie(20 min)</a:t>
+            </a:r>
+          </a:p>
+        </p:txBody>
+      </p:sp>
+      <p:sp>
+        <p:nvSpPr>
+          <p:cNvPr id="4" name="TextBox 3"/>
+          <p:cNvSpPr txBox="1"/>
+          <p:nvPr/>
+        </p:nvSpPr>
+        <p:spPr>
+          <a:xfrm>
+            <a:off x="457200" y="1371600"/>
+            <a:ext cx="7772400" cy="4572000"/>
+          </a:xfrm>
+          <a:prstGeom prst="rect">
+            <a:avLst/>
+          </a:prstGeom>
+          <a:noFill/>
+        </p:spPr>
+        <p:txBody>
+          <a:bodyPr wrap="square">
+            <a:spAutoFit/>
+          </a:bodyPr>
+          <a:lstStyle/>
+          <a:p>
+            <a:pPr>
+              <a:spcAft>
+                <a:spcPts val="600"/>
+              </a:spcAft>
+              <a:defRPr sz="1400">
+                <a:solidFill>
+                  <a:srgbClr val="222222"/>
+                </a:solidFill>
+              </a:defRPr>
+            </a:pPr>
+            <a:r>
+              <a:t>• Pourquoi intégrer les TIC en classe de langues ?- Motivation et engagement des apprenants</a:t>
+            </a:r>
+            <a:br/>
+            <a:r>
+              <a:t>- Accès à des ressources authentiques (vidéos, articles, podcasts)</a:t>
+            </a:r>
+            <a:br/>
+            <a:r>
+              <a:t>- Individualisation des parcours</a:t>
+            </a:r>
+            <a:br/>
+            <a:r>
+              <a:t>- Développement de l'autonomie</a:t>
+            </a:r>
+          </a:p>
+          <a:p>
+            <a:pPr>
+              <a:spcAft>
+                <a:spcPts val="600"/>
+              </a:spcAft>
+              <a:defRPr sz="1400">
+                <a:solidFill>
+                  <a:srgbClr val="222222"/>
+                </a:solidFill>
+              </a:defRPr>
+            </a:pPr>
+            <a:r>
+              <a:t>• Domaines d'application :- Compréhension orale : podcasts, baladodiffusion</a:t>
+            </a:r>
+            <a:br/>
+            <a:r>
+              <a:t>- Production écrite : blogs, wikis, correction collaborative</a:t>
+            </a:r>
+            <a:br/>
+            <a:r>
+              <a:t>- Interaction : visioconférence avec classes partenaires</a:t>
+            </a:r>
+            <a:br/>
+            <a:r>
+              <a:t>- Grammaire/vocabulaire : exercices interactifs, quiz</a:t>
+            </a:r>
+          </a:p>
+        </p:txBody>
+      </p:sp>
+    </p:spTree>
+  </p:cSld>
+  <p:clrMapOvr>
+    <a:masterClrMapping/>
+  </p:clrMapOvr>
+</p:sld>
+</file>
+
+<file path=ppt/slides/slide9.xml><?xml version="1.0" encoding="utf-8"?>
+<p:sld xmlns:a="http://schemas.openxmlformats.org/drawingml/2006/main" xmlns:p="http://schemas.openxmlformats.org/presentationml/2006/main" xmlns:r="http://schemas.openxmlformats.org/officeDocument/2006/relationships">
+  <p:cSld>
+    <p:bg>
+      <p:bgPr>
+        <a:solidFill>
+          <a:srgbClr val="FFFFFF"/>
+        </a:solidFill>
+        <a:effectLst/>
+      </p:bgPr>
+    </p:bg>
+    <p:spTree>
+      <p:nvGrpSpPr>
+        <p:cNvPr id="1" name=""/>
+        <p:cNvGrpSpPr/>
+        <p:nvPr/>
+      </p:nvGrpSpPr>
+      <p:grpSpPr/>
+      <p:sp>
+        <p:nvSpPr>
+          <p:cNvPr id="2" name="Rectangle 1"/>
+          <p:cNvSpPr/>
+          <p:nvPr/>
+        </p:nvSpPr>
+        <p:spPr>
+          <a:xfrm>
+            <a:off x="0" y="0"/>
+            <a:ext cx="109728" cy="6858000"/>
+          </a:xfrm>
+          <a:prstGeom prst="rect">
+            <a:avLst/>
+          </a:prstGeom>
+          <a:solidFill>
+            <a:srgbClr val="2C6E49"/>
+          </a:solidFill>
+          <a:ln>
+            <a:noFill/>
+          </a:ln>
+        </p:spPr>
+        <p:style>
+          <a:lnRef idx="1">
+            <a:schemeClr val="accent1"/>
+          </a:lnRef>
+          <a:fillRef idx="3">
+            <a:schemeClr val="accent1"/>
+          </a:fillRef>
+          <a:effectRef idx="2">
+            <a:schemeClr val="accent1"/>
+          </a:effectRef>
+          <a:fontRef idx="minor">
+            <a:schemeClr val="lt1"/>
+          </a:fontRef>
+        </p:style>
+        <p:txBody>
+          <a:bodyPr rtlCol="0" anchor="ctr"/>
+          <a:lstStyle/>
+          <a:p>
+            <a:pPr algn="ctr"/>
+          </a:p>
+        </p:txBody>
+      </p:sp>
+      <p:sp>
+        <p:nvSpPr>
+          <p:cNvPr id="3" name="TextBox 2"/>
+          <p:cNvSpPr txBox="1"/>
+          <p:nvPr/>
+        </p:nvSpPr>
+        <p:spPr>
+          <a:xfrm>
+            <a:off x="457200" y="365760"/>
+            <a:ext cx="8229600" cy="640080"/>
+          </a:xfrm>
+          <a:prstGeom prst="rect">
+            <a:avLst/>
+          </a:prstGeom>
+          <a:noFill/>
+        </p:spPr>
+        <p:txBody>
+          <a:bodyPr wrap="square">
+            <a:spAutoFit/>
+          </a:bodyPr>
+          <a:lstStyle/>
+          <a:p>
+            <a:pPr algn="l">
+              <a:defRPr sz="2200" b="1">
+                <a:solidFill>
+                  <a:srgbClr val="1A5C33"/>
+                </a:solidFill>
+              </a:defRPr>
+            </a:pPr>
+            <a:r>
+              <a:t>4. Modèle SAMR(15 min)</a:t>
+            </a:r>
+          </a:p>
+        </p:txBody>
+      </p:sp>
+      <p:sp>
+        <p:nvSpPr>
+          <p:cNvPr id="4" name="TextBox 3"/>
+          <p:cNvSpPr txBox="1"/>
+          <p:nvPr/>
+        </p:nvSpPr>
+        <p:spPr>
+          <a:xfrm>
+            <a:off x="457200" y="1371600"/>
+            <a:ext cx="7772400" cy="4572000"/>
+          </a:xfrm>
+          <a:prstGeom prst="rect">
+            <a:avLst/>
+          </a:prstGeom>
+          <a:noFill/>
+        </p:spPr>
+        <p:txBody>
+          <a:bodyPr wrap="square">
+            <a:spAutoFit/>
+          </a:bodyPr>
+          <a:lstStyle/>
+          <a:p>
+            <a:pPr>
+              <a:spcAft>
+                <a:spcPts val="600"/>
+              </a:spcAft>
+              <a:defRPr sz="1400">
+                <a:solidFill>
+                  <a:srgbClr val="222222"/>
+                </a:solidFill>
+              </a:defRPr>
+            </a:pPr>
+            <a:r>
+              <a:t>• Le modèle SAMR (Puentedura) décrit l'intégration technologique :</a:t>
+            </a:r>
+          </a:p>
+          <a:p>
+            <a:pPr>
+              <a:spcAft>
+                <a:spcPts val="600"/>
+              </a:spcAft>
+              <a:defRPr sz="1400">
+                <a:solidFill>
+                  <a:srgbClr val="222222"/>
+                </a:solidFill>
+              </a:defRPr>
+            </a:pPr>
+            <a:r>
+              <a:t>• Objectif pour l'enseignant :viser au moins les niveauxModificationetRedéfinition.</a:t>
+            </a:r>
+          </a:p>
+        </p:txBody>
+      </p:sp>
+    </p:spTree>
+  </p:cSld>
+  <p:clrMapOvr>
+    <a:masterClrMapping/>
+  </p:clrMapOvr>
 </p:sld>
 </file>
 

--- a/cours/Module TIC/Département Français/ENS 2ème année/Cours_TIC_ENS_2eme_annee_FR.pptx
+++ b/cours/Module TIC/Département Français/ENS 2ème année/Cours_TIC_ENS_2eme_annee_FR.pptx
@@ -2850,7 +2850,7 @@
           <a:solidFill>
             <a:schemeClr val="tx1"/>
           </a:solidFill>
-          <a:latin typeface="+mj-lt"/>
+          <a:latin typeface="Poppins"/>
           <a:ea typeface="+mj-ea"/>
           <a:cs typeface="+mj-cs"/>
         </a:defRPr>
@@ -2867,7 +2867,7 @@
           <a:solidFill>
             <a:schemeClr val="tx1"/>
           </a:solidFill>
-          <a:latin typeface="+mn-lt"/>
+          <a:latin typeface="Poppins"/>
           <a:ea typeface="+mn-ea"/>
           <a:cs typeface="+mn-cs"/>
         </a:defRPr>
@@ -2882,7 +2882,7 @@
           <a:solidFill>
             <a:schemeClr val="tx1"/>
           </a:solidFill>
-          <a:latin typeface="+mn-lt"/>
+          <a:latin typeface="Poppins"/>
           <a:ea typeface="+mn-ea"/>
           <a:cs typeface="+mn-cs"/>
         </a:defRPr>
@@ -2897,7 +2897,7 @@
           <a:solidFill>
             <a:schemeClr val="tx1"/>
           </a:solidFill>
-          <a:latin typeface="+mn-lt"/>
+          <a:latin typeface="Poppins"/>
           <a:ea typeface="+mn-ea"/>
           <a:cs typeface="+mn-cs"/>
         </a:defRPr>
@@ -2912,7 +2912,7 @@
           <a:solidFill>
             <a:schemeClr val="tx1"/>
           </a:solidFill>
-          <a:latin typeface="+mn-lt"/>
+          <a:latin typeface="Poppins"/>
           <a:ea typeface="+mn-ea"/>
           <a:cs typeface="+mn-cs"/>
         </a:defRPr>
@@ -2927,7 +2927,7 @@
           <a:solidFill>
             <a:schemeClr val="tx1"/>
           </a:solidFill>
-          <a:latin typeface="+mn-lt"/>
+          <a:latin typeface="Poppins"/>
           <a:ea typeface="+mn-ea"/>
           <a:cs typeface="+mn-cs"/>
         </a:defRPr>
@@ -2942,7 +2942,7 @@
           <a:solidFill>
             <a:schemeClr val="tx1"/>
           </a:solidFill>
-          <a:latin typeface="+mn-lt"/>
+          <a:latin typeface="Poppins"/>
           <a:ea typeface="+mn-ea"/>
           <a:cs typeface="+mn-cs"/>
         </a:defRPr>
@@ -2957,7 +2957,7 @@
           <a:solidFill>
             <a:schemeClr val="tx1"/>
           </a:solidFill>
-          <a:latin typeface="+mn-lt"/>
+          <a:latin typeface="Poppins"/>
           <a:ea typeface="+mn-ea"/>
           <a:cs typeface="+mn-cs"/>
         </a:defRPr>
@@ -2972,7 +2972,7 @@
           <a:solidFill>
             <a:schemeClr val="tx1"/>
           </a:solidFill>
-          <a:latin typeface="+mn-lt"/>
+          <a:latin typeface="Poppins"/>
           <a:ea typeface="+mn-ea"/>
           <a:cs typeface="+mn-cs"/>
         </a:defRPr>
@@ -2987,7 +2987,7 @@
           <a:solidFill>
             <a:schemeClr val="tx1"/>
           </a:solidFill>
-          <a:latin typeface="+mn-lt"/>
+          <a:latin typeface="Poppins"/>
           <a:ea typeface="+mn-ea"/>
           <a:cs typeface="+mn-cs"/>
         </a:defRPr>
@@ -3002,7 +3002,7 @@
           <a:solidFill>
             <a:schemeClr val="tx1"/>
           </a:solidFill>
-          <a:latin typeface="+mn-lt"/>
+          <a:latin typeface="Poppins"/>
           <a:ea typeface="+mn-ea"/>
           <a:cs typeface="+mn-cs"/>
         </a:defRPr>
@@ -3012,7 +3012,7 @@
           <a:solidFill>
             <a:schemeClr val="tx1"/>
           </a:solidFill>
-          <a:latin typeface="+mn-lt"/>
+          <a:latin typeface="Poppins"/>
           <a:ea typeface="+mn-ea"/>
           <a:cs typeface="+mn-cs"/>
         </a:defRPr>
@@ -3022,7 +3022,7 @@
           <a:solidFill>
             <a:schemeClr val="tx1"/>
           </a:solidFill>
-          <a:latin typeface="+mn-lt"/>
+          <a:latin typeface="Poppins"/>
           <a:ea typeface="+mn-ea"/>
           <a:cs typeface="+mn-cs"/>
         </a:defRPr>
@@ -3032,7 +3032,7 @@
           <a:solidFill>
             <a:schemeClr val="tx1"/>
           </a:solidFill>
-          <a:latin typeface="+mn-lt"/>
+          <a:latin typeface="Poppins"/>
           <a:ea typeface="+mn-ea"/>
           <a:cs typeface="+mn-cs"/>
         </a:defRPr>
@@ -3042,7 +3042,7 @@
           <a:solidFill>
             <a:schemeClr val="tx1"/>
           </a:solidFill>
-          <a:latin typeface="+mn-lt"/>
+          <a:latin typeface="Poppins"/>
           <a:ea typeface="+mn-ea"/>
           <a:cs typeface="+mn-cs"/>
         </a:defRPr>
@@ -3052,7 +3052,7 @@
           <a:solidFill>
             <a:schemeClr val="tx1"/>
           </a:solidFill>
-          <a:latin typeface="+mn-lt"/>
+          <a:latin typeface="Poppins"/>
           <a:ea typeface="+mn-ea"/>
           <a:cs typeface="+mn-cs"/>
         </a:defRPr>
@@ -3062,7 +3062,7 @@
           <a:solidFill>
             <a:schemeClr val="tx1"/>
           </a:solidFill>
-          <a:latin typeface="+mn-lt"/>
+          <a:latin typeface="Poppins"/>
           <a:ea typeface="+mn-ea"/>
           <a:cs typeface="+mn-cs"/>
         </a:defRPr>
@@ -3072,7 +3072,7 @@
           <a:solidFill>
             <a:schemeClr val="tx1"/>
           </a:solidFill>
-          <a:latin typeface="+mn-lt"/>
+          <a:latin typeface="Poppins"/>
           <a:ea typeface="+mn-ea"/>
           <a:cs typeface="+mn-cs"/>
         </a:defRPr>
@@ -3082,7 +3082,7 @@
           <a:solidFill>
             <a:schemeClr val="tx1"/>
           </a:solidFill>
-          <a:latin typeface="+mn-lt"/>
+          <a:latin typeface="Poppins"/>
           <a:ea typeface="+mn-ea"/>
           <a:cs typeface="+mn-cs"/>
         </a:defRPr>
@@ -3097,9 +3097,7 @@
   <p:cSld>
     <p:bg>
       <p:bgPr>
-        <a:solidFill>
-          <a:srgbClr val="1A5C33"/>
-        </a:solidFill>
+        <a:solidFill>val="006847"/&gt;</a:solidFill>
         <a:effectLst/>
       </p:bgPr>
     </p:bg>
@@ -3134,9 +3132,7 @@
           <a:p>
             <a:pPr algn="ctr">
               <a:defRPr sz="3200" b="1">
-                <a:solidFill>
-                  <a:srgbClr val="FFFFFF"/>
-                </a:solidFill>
+                <a:solidFill>val="FFFFFF"/&gt;</a:solidFill>
               </a:defRPr>
             </a:pPr>
             <a:r>
@@ -3169,9 +3165,7 @@
           <a:p>
             <a:pPr algn="ctr">
               <a:defRPr sz="2000" b="0">
-                <a:solidFill>
-                  <a:srgbClr val="C5D9C7"/>
-                </a:solidFill>
+                <a:solidFill>val="DFE5EA"/&gt;</a:solidFill>
               </a:defRPr>
             </a:pPr>
             <a:r>
@@ -3204,13 +3198,52 @@
           <a:p>
             <a:pPr algn="ctr">
               <a:defRPr sz="1600" b="0">
+                <a:solidFill>val="B7C9BE"/&gt;</a:solidFill>
+              </a:defRPr>
+            </a:pPr>
+            <a:r>
+              <a:t>Université de Mostaganem — MCB</a:t>
+            </a:r>
+          </a:p>
+        </p:txBody>
+      </p:sp>
+      <p:sp>
+        <p:nvSpPr>
+          <p:cNvPr id="990001" name="Pied de page FLE"/>
+          <p:cNvSpPr>
+            <a:spLocks noGrp="1"/>
+          </p:cNvSpPr>
+          <p:nvPr/>
+        </p:nvSpPr>
+        <p:spPr>
+          <a:xfrm>
+            <a:off x="2880360" y="914400"/>
+            <a:ext cx="4572000" cy="274320"/>
+          </a:xfrm>
+          <a:prstGeom prst="rect">
+            <a:avLst/>
+          </a:prstGeom>
+        </p:spPr>
+        <p:txBody>
+          <a:bodyPr anchor="b"/>
+          <a:lstStyle/>
+          <a:p>
+            <a:pPr algn="r">
+              <a:defRPr sz="900">
                 <a:solidFill>
-                  <a:srgbClr val="A0CFA0"/>
+                  <a:srgbClr val="9AA7B6"/>
                 </a:solidFill>
-              </a:defRPr>
-            </a:pPr>
-            <a:r>
-              <a:t>Université de Mostaganem — MCB</a:t>
+                <a:latin typeface="Poppins"/>
+              </a:defRPr>
+            </a:pPr>
+            <a:r>
+              <a:rPr lang="fr-FR" sz="900">
+                <a:solidFill>
+                  <a:srgbClr val="9AA7B6"/>
+                </a:solidFill>
+                <a:latin typeface="Poppins"/>
+              </a:rPr>
+              <a:t>Université de Mostaganem — Dr. Madani BELACEL</a:t>
             </a:r>
           </a:p>
         </p:txBody>
@@ -3228,9 +3261,7 @@
   <p:cSld>
     <p:bg>
       <p:bgPr>
-        <a:solidFill>
-          <a:srgbClr val="FFFFFF"/>
-        </a:solidFill>
+        <a:solidFill>val="FFFFFF"/&gt;</a:solidFill>
         <a:effectLst/>
       </p:bgPr>
     </p:bg>
@@ -3255,9 +3286,7 @@
           <a:prstGeom prst="rect">
             <a:avLst/>
           </a:prstGeom>
-          <a:solidFill>
-            <a:srgbClr val="2C6E49"/>
-          </a:solidFill>
+          <a:solidFill>val="00875B"/&gt;</a:solidFill>
           <a:ln>
             <a:noFill/>
           </a:ln>
@@ -3308,9 +3337,7 @@
           <a:p>
             <a:pPr algn="l">
               <a:defRPr sz="2200" b="1">
-                <a:solidFill>
-                  <a:srgbClr val="1A5C33"/>
-                </a:solidFill>
+                <a:solidFill>val="006847"/&gt;</a:solidFill>
               </a:defRPr>
             </a:pPr>
             <a:r>
@@ -3346,9 +3373,7 @@
                 <a:spcPts val="600"/>
               </a:spcAft>
               <a:defRPr sz="1400">
-                <a:solidFill>
-                  <a:srgbClr val="222222"/>
-                </a:solidFill>
+                <a:solidFill>val="22344A"/&gt;</a:solidFill>
               </a:defRPr>
             </a:pPr>
             <a:r>
@@ -3361,9 +3386,7 @@
                 <a:spcPts val="600"/>
               </a:spcAft>
               <a:defRPr sz="1400">
-                <a:solidFill>
-                  <a:srgbClr val="222222"/>
-                </a:solidFill>
+                <a:solidFill>val="22344A"/&gt;</a:solidFill>
               </a:defRPr>
             </a:pPr>
             <a:r>
@@ -3376,9 +3399,7 @@
                 <a:spcPts val="600"/>
               </a:spcAft>
               <a:defRPr sz="1400">
-                <a:solidFill>
-                  <a:srgbClr val="222222"/>
-                </a:solidFill>
+                <a:solidFill>val="22344A"/&gt;</a:solidFill>
               </a:defRPr>
             </a:pPr>
             <a:r>
@@ -3391,13 +3412,52 @@
                 <a:spcPts val="600"/>
               </a:spcAft>
               <a:defRPr sz="1400">
+                <a:solidFill>val="22344A"/&gt;</a:solidFill>
+              </a:defRPr>
+            </a:pPr>
+            <a:r>
+              <a:t>• Identité numérique: l'enseignant comme modèle</a:t>
+            </a:r>
+          </a:p>
+        </p:txBody>
+      </p:sp>
+      <p:sp>
+        <p:nvSpPr>
+          <p:cNvPr id="990001" name="Pied de page FLE"/>
+          <p:cNvSpPr>
+            <a:spLocks noGrp="1"/>
+          </p:cNvSpPr>
+          <p:nvPr/>
+        </p:nvSpPr>
+        <p:spPr>
+          <a:xfrm>
+            <a:off x="-228600" y="6400800"/>
+            <a:ext cx="109728" cy="274320"/>
+          </a:xfrm>
+          <a:prstGeom prst="rect">
+            <a:avLst/>
+          </a:prstGeom>
+        </p:spPr>
+        <p:txBody>
+          <a:bodyPr anchor="b"/>
+          <a:lstStyle/>
+          <a:p>
+            <a:pPr algn="r">
+              <a:defRPr sz="900">
                 <a:solidFill>
-                  <a:srgbClr val="222222"/>
+                  <a:srgbClr val="9AA7B6"/>
                 </a:solidFill>
-              </a:defRPr>
-            </a:pPr>
-            <a:r>
-              <a:t>• Identité numérique: l'enseignant comme modèle</a:t>
+                <a:latin typeface="Poppins"/>
+              </a:defRPr>
+            </a:pPr>
+            <a:r>
+              <a:rPr lang="fr-FR" sz="900">
+                <a:solidFill>
+                  <a:srgbClr val="9AA7B6"/>
+                </a:solidFill>
+                <a:latin typeface="Poppins"/>
+              </a:rPr>
+              <a:t>Université de Mostaganem — Dr. Madani BELACEL</a:t>
             </a:r>
           </a:p>
         </p:txBody>
@@ -3415,9 +3475,7 @@
   <p:cSld>
     <p:bg>
       <p:bgPr>
-        <a:solidFill>
-          <a:srgbClr val="FFFFFF"/>
-        </a:solidFill>
+        <a:solidFill>val="FFFFFF"/&gt;</a:solidFill>
         <a:effectLst/>
       </p:bgPr>
     </p:bg>
@@ -3442,9 +3500,7 @@
           <a:prstGeom prst="rect">
             <a:avLst/>
           </a:prstGeom>
-          <a:solidFill>
-            <a:srgbClr val="2C6E49"/>
-          </a:solidFill>
+          <a:solidFill>val="00875B"/&gt;</a:solidFill>
           <a:ln>
             <a:noFill/>
           </a:ln>
@@ -3495,9 +3551,7 @@
           <a:p>
             <a:pPr algn="l">
               <a:defRPr sz="2200" b="1">
-                <a:solidFill>
-                  <a:srgbClr val="1A5C33"/>
-                </a:solidFill>
+                <a:solidFill>val="006847"/&gt;</a:solidFill>
               </a:defRPr>
             </a:pPr>
             <a:r>
@@ -3533,9 +3587,7 @@
                 <a:spcPts val="600"/>
               </a:spcAft>
               <a:defRPr sz="1400">
-                <a:solidFill>
-                  <a:srgbClr val="222222"/>
-                </a:solidFill>
+                <a:solidFill>val="22344A"/&gt;</a:solidFill>
               </a:defRPr>
             </a:pPr>
             <a:r>
@@ -3548,9 +3600,7 @@
                 <a:spcPts val="600"/>
               </a:spcAft>
               <a:defRPr sz="1400">
-                <a:solidFill>
-                  <a:srgbClr val="222222"/>
-                </a:solidFill>
+                <a:solidFill>val="22344A"/&gt;</a:solidFill>
               </a:defRPr>
             </a:pPr>
             <a:r>
@@ -3563,9 +3613,7 @@
                 <a:spcPts val="600"/>
               </a:spcAft>
               <a:defRPr sz="1400">
-                <a:solidFill>
-                  <a:srgbClr val="222222"/>
-                </a:solidFill>
+                <a:solidFill>val="22344A"/&gt;</a:solidFill>
               </a:defRPr>
             </a:pPr>
             <a:r>
@@ -3578,13 +3626,52 @@
                 <a:spcPts val="600"/>
               </a:spcAft>
               <a:defRPr sz="1400">
+                <a:solidFill>val="22344A"/&gt;</a:solidFill>
+              </a:defRPr>
+            </a:pPr>
+            <a:r>
+              <a:t>• TD 01(1h30) — analyse d'outils TIC pour la classe.Prochain cours :Matériel informatique et architecture.</a:t>
+            </a:r>
+          </a:p>
+        </p:txBody>
+      </p:sp>
+      <p:sp>
+        <p:nvSpPr>
+          <p:cNvPr id="990001" name="Pied de page FLE"/>
+          <p:cNvSpPr>
+            <a:spLocks noGrp="1"/>
+          </p:cNvSpPr>
+          <p:nvPr/>
+        </p:nvSpPr>
+        <p:spPr>
+          <a:xfrm>
+            <a:off x="-228600" y="6400800"/>
+            <a:ext cx="109728" cy="274320"/>
+          </a:xfrm>
+          <a:prstGeom prst="rect">
+            <a:avLst/>
+          </a:prstGeom>
+        </p:spPr>
+        <p:txBody>
+          <a:bodyPr anchor="b"/>
+          <a:lstStyle/>
+          <a:p>
+            <a:pPr algn="r">
+              <a:defRPr sz="900">
                 <a:solidFill>
-                  <a:srgbClr val="222222"/>
+                  <a:srgbClr val="9AA7B6"/>
                 </a:solidFill>
-              </a:defRPr>
-            </a:pPr>
-            <a:r>
-              <a:t>• TD 01(1h30) — analyse d'outils TIC pour la classe.Prochain cours :Matériel informatique et architecture.</a:t>
+                <a:latin typeface="Poppins"/>
+              </a:defRPr>
+            </a:pPr>
+            <a:r>
+              <a:rPr lang="fr-FR" sz="900">
+                <a:solidFill>
+                  <a:srgbClr val="9AA7B6"/>
+                </a:solidFill>
+                <a:latin typeface="Poppins"/>
+              </a:rPr>
+              <a:t>Université de Mostaganem — Dr. Madani BELACEL</a:t>
             </a:r>
           </a:p>
         </p:txBody>
@@ -3602,9 +3689,7 @@
   <p:cSld>
     <p:bg>
       <p:bgPr>
-        <a:solidFill>
-          <a:srgbClr val="FFFFFF"/>
-        </a:solidFill>
+        <a:solidFill>val="FFFFFF"/&gt;</a:solidFill>
         <a:effectLst/>
       </p:bgPr>
     </p:bg>
@@ -3629,9 +3714,7 @@
           <a:prstGeom prst="rect">
             <a:avLst/>
           </a:prstGeom>
-          <a:solidFill>
-            <a:srgbClr val="2C6E49"/>
-          </a:solidFill>
+          <a:solidFill>val="00875B"/&gt;</a:solidFill>
           <a:ln>
             <a:noFill/>
           </a:ln>
@@ -3682,9 +3765,7 @@
           <a:p>
             <a:pPr algn="l">
               <a:defRPr sz="2200" b="1">
-                <a:solidFill>
-                  <a:srgbClr val="1A5C33"/>
-                </a:solidFill>
+                <a:solidFill>val="006847"/&gt;</a:solidFill>
               </a:defRPr>
             </a:pPr>
             <a:r>
@@ -3720,9 +3801,7 @@
                 <a:spcPts val="600"/>
               </a:spcAft>
               <a:defRPr sz="1400">
-                <a:solidFill>
-                  <a:srgbClr val="222222"/>
-                </a:solidFill>
+                <a:solidFill>val="22344A"/&gt;</a:solidFill>
               </a:defRPr>
             </a:pPr>
             <a:r>
@@ -3735,9 +3814,7 @@
                 <a:spcPts val="600"/>
               </a:spcAft>
               <a:defRPr sz="1400">
-                <a:solidFill>
-                  <a:srgbClr val="222222"/>
-                </a:solidFill>
+                <a:solidFill>val="22344A"/&gt;</a:solidFill>
               </a:defRPr>
             </a:pPr>
             <a:r>
@@ -3750,13 +3827,52 @@
                 <a:spcPts val="600"/>
               </a:spcAft>
               <a:defRPr sz="1400">
+                <a:solidFill>val="22344A"/&gt;</a:solidFill>
+              </a:defRPr>
+            </a:pPr>
+            <a:r>
+              <a:t>• Compétences pré-requises :Séance TIC 01 ; notions de fichiers et dossiers</a:t>
+            </a:r>
+          </a:p>
+        </p:txBody>
+      </p:sp>
+      <p:sp>
+        <p:nvSpPr>
+          <p:cNvPr id="990001" name="Pied de page FLE"/>
+          <p:cNvSpPr>
+            <a:spLocks noGrp="1"/>
+          </p:cNvSpPr>
+          <p:nvPr/>
+        </p:nvSpPr>
+        <p:spPr>
+          <a:xfrm>
+            <a:off x="-228600" y="6400800"/>
+            <a:ext cx="109728" cy="274320"/>
+          </a:xfrm>
+          <a:prstGeom prst="rect">
+            <a:avLst/>
+          </a:prstGeom>
+        </p:spPr>
+        <p:txBody>
+          <a:bodyPr anchor="b"/>
+          <a:lstStyle/>
+          <a:p>
+            <a:pPr algn="r">
+              <a:defRPr sz="900">
                 <a:solidFill>
-                  <a:srgbClr val="222222"/>
+                  <a:srgbClr val="9AA7B6"/>
                 </a:solidFill>
-              </a:defRPr>
-            </a:pPr>
-            <a:r>
-              <a:t>• Compétences pré-requises :Séance TIC 01 ; notions de fichiers et dossiers</a:t>
+                <a:latin typeface="Poppins"/>
+              </a:defRPr>
+            </a:pPr>
+            <a:r>
+              <a:rPr lang="fr-FR" sz="900">
+                <a:solidFill>
+                  <a:srgbClr val="9AA7B6"/>
+                </a:solidFill>
+                <a:latin typeface="Poppins"/>
+              </a:rPr>
+              <a:t>Université de Mostaganem — Dr. Madani BELACEL</a:t>
             </a:r>
           </a:p>
         </p:txBody>
@@ -3774,9 +3890,7 @@
   <p:cSld>
     <p:bg>
       <p:bgPr>
-        <a:solidFill>
-          <a:srgbClr val="E8F0E9"/>
-        </a:solidFill>
+        <a:solidFill>val="F4F6F8"/&gt;</a:solidFill>
         <a:effectLst/>
       </p:bgPr>
     </p:bg>
@@ -3811,9 +3925,7 @@
           <a:p>
             <a:pPr algn="ctr">
               <a:defRPr sz="2600" b="1">
-                <a:solidFill>
-                  <a:srgbClr val="1A5C33"/>
-                </a:solidFill>
+                <a:solidFill>val="006847"/&gt;</a:solidFill>
               </a:defRPr>
             </a:pPr>
             <a:r>
@@ -3849,9 +3961,7 @@
                 <a:spcPts val="600"/>
               </a:spcAft>
               <a:defRPr sz="1600">
-                <a:solidFill>
-                  <a:srgbClr val="222222"/>
-                </a:solidFill>
+                <a:solidFill>val="22344A"/&gt;</a:solidFill>
               </a:defRPr>
             </a:pPr>
             <a:r>
@@ -3864,9 +3974,7 @@
                 <a:spcPts val="600"/>
               </a:spcAft>
               <a:defRPr sz="1600">
-                <a:solidFill>
-                  <a:srgbClr val="222222"/>
-                </a:solidFill>
+                <a:solidFill>val="22344A"/&gt;</a:solidFill>
               </a:defRPr>
             </a:pPr>
             <a:r>
@@ -3887,9 +3995,7 @@
                 <a:spcPts val="600"/>
               </a:spcAft>
               <a:defRPr sz="1600">
-                <a:solidFill>
-                  <a:srgbClr val="222222"/>
-                </a:solidFill>
+                <a:solidFill>val="22344A"/&gt;</a:solidFill>
               </a:defRPr>
             </a:pPr>
             <a:r>
@@ -3902,9 +4008,7 @@
                 <a:spcPts val="600"/>
               </a:spcAft>
               <a:defRPr sz="1600">
-                <a:solidFill>
-                  <a:srgbClr val="222222"/>
-                </a:solidFill>
+                <a:solidFill>val="22344A"/&gt;</a:solidFill>
               </a:defRPr>
             </a:pPr>
             <a:r>
@@ -3917,25 +4021,64 @@
                 <a:spcPts val="600"/>
               </a:spcAft>
               <a:defRPr sz="1600">
+                <a:solidFill>val="22344A"/&gt;</a:solidFill>
+              </a:defRPr>
+            </a:pPr>
+            <a:r>
+              <a:t>• Pourquoi intégrer les TIC en classe de langues ?- Motivation et engagement des apprenants</a:t>
+            </a:r>
+            <a:br/>
+            <a:r>
+              <a:t>- Accès à des ressources authentiques (vidéos, articles, podcasts)</a:t>
+            </a:r>
+            <a:br/>
+            <a:r>
+              <a:t>- Individualisation des parcours</a:t>
+            </a:r>
+            <a:br/>
+            <a:r>
+              <a:t>- Développement de l'autonomie</a:t>
+            </a:r>
+          </a:p>
+        </p:txBody>
+      </p:sp>
+      <p:sp>
+        <p:nvSpPr>
+          <p:cNvPr id="990001" name="Pied de page FLE"/>
+          <p:cNvSpPr>
+            <a:spLocks noGrp="1"/>
+          </p:cNvSpPr>
+          <p:nvPr/>
+        </p:nvSpPr>
+        <p:spPr>
+          <a:xfrm>
+            <a:off x="2971800" y="182880"/>
+            <a:ext cx="4572000" cy="274320"/>
+          </a:xfrm>
+          <a:prstGeom prst="rect">
+            <a:avLst/>
+          </a:prstGeom>
+        </p:spPr>
+        <p:txBody>
+          <a:bodyPr anchor="b"/>
+          <a:lstStyle/>
+          <a:p>
+            <a:pPr algn="r">
+              <a:defRPr sz="900">
                 <a:solidFill>
-                  <a:srgbClr val="222222"/>
+                  <a:srgbClr val="9AA7B6"/>
                 </a:solidFill>
-              </a:defRPr>
-            </a:pPr>
-            <a:r>
-              <a:t>• Pourquoi intégrer les TIC en classe de langues ?- Motivation et engagement des apprenants</a:t>
-            </a:r>
-            <a:br/>
-            <a:r>
-              <a:t>- Accès à des ressources authentiques (vidéos, articles, podcasts)</a:t>
-            </a:r>
-            <a:br/>
-            <a:r>
-              <a:t>- Individualisation des parcours</a:t>
-            </a:r>
-            <a:br/>
-            <a:r>
-              <a:t>- Développement de l'autonomie</a:t>
+                <a:latin typeface="Poppins"/>
+              </a:defRPr>
+            </a:pPr>
+            <a:r>
+              <a:rPr lang="fr-FR" sz="900">
+                <a:solidFill>
+                  <a:srgbClr val="9AA7B6"/>
+                </a:solidFill>
+                <a:latin typeface="Poppins"/>
+              </a:rPr>
+              <a:t>Université de Mostaganem — Dr. Madani BELACEL</a:t>
             </a:r>
           </a:p>
         </p:txBody>
@@ -3953,9 +4096,7 @@
   <p:cSld>
     <p:bg>
       <p:bgPr>
-        <a:solidFill>
-          <a:srgbClr val="FFFFFF"/>
-        </a:solidFill>
+        <a:solidFill>val="FFFFFF"/&gt;</a:solidFill>
         <a:effectLst/>
       </p:bgPr>
     </p:bg>
@@ -3990,9 +4131,7 @@
           <a:p>
             <a:pPr algn="ctr">
               <a:defRPr sz="2600" b="1">
-                <a:solidFill>
-                  <a:srgbClr val="1A5C33"/>
-                </a:solidFill>
+                <a:solidFill>val="006847"/&gt;</a:solidFill>
               </a:defRPr>
             </a:pPr>
             <a:r>
@@ -4028,9 +4167,7 @@
                 <a:spcPts val="600"/>
               </a:spcAft>
               <a:defRPr sz="1500">
-                <a:solidFill>
-                  <a:srgbClr val="222222"/>
-                </a:solidFill>
+                <a:solidFill>val="22344A"/&gt;</a:solidFill>
               </a:defRPr>
             </a:pPr>
             <a:r>
@@ -4043,9 +4180,7 @@
                 <a:spcPts val="600"/>
               </a:spcAft>
               <a:defRPr sz="1500">
-                <a:solidFill>
-                  <a:srgbClr val="222222"/>
-                </a:solidFill>
+                <a:solidFill>val="22344A"/&gt;</a:solidFill>
               </a:defRPr>
             </a:pPr>
             <a:r>
@@ -4058,9 +4193,7 @@
                 <a:spcPts val="600"/>
               </a:spcAft>
               <a:defRPr sz="1500">
-                <a:solidFill>
-                  <a:srgbClr val="222222"/>
-                </a:solidFill>
+                <a:solidFill>val="22344A"/&gt;</a:solidFill>
               </a:defRPr>
             </a:pPr>
             <a:r>
@@ -4073,9 +4206,7 @@
                 <a:spcPts val="600"/>
               </a:spcAft>
               <a:defRPr sz="1500">
-                <a:solidFill>
-                  <a:srgbClr val="222222"/>
-                </a:solidFill>
+                <a:solidFill>val="22344A"/&gt;</a:solidFill>
               </a:defRPr>
             </a:pPr>
             <a:r>
@@ -4088,13 +4219,52 @@
                 <a:spcPts val="600"/>
               </a:spcAft>
               <a:defRPr sz="1500">
+                <a:solidFill>val="22344A"/&gt;</a:solidFill>
+              </a:defRPr>
+            </a:pPr>
+            <a:r>
+              <a:t>• Préparer une courte présentation orale</a:t>
+            </a:r>
+          </a:p>
+        </p:txBody>
+      </p:sp>
+      <p:sp>
+        <p:nvSpPr>
+          <p:cNvPr id="990001" name="Pied de page FLE"/>
+          <p:cNvSpPr>
+            <a:spLocks noGrp="1"/>
+          </p:cNvSpPr>
+          <p:nvPr/>
+        </p:nvSpPr>
+        <p:spPr>
+          <a:xfrm>
+            <a:off x="2971800" y="182880"/>
+            <a:ext cx="4572000" cy="274320"/>
+          </a:xfrm>
+          <a:prstGeom prst="rect">
+            <a:avLst/>
+          </a:prstGeom>
+        </p:spPr>
+        <p:txBody>
+          <a:bodyPr anchor="b"/>
+          <a:lstStyle/>
+          <a:p>
+            <a:pPr algn="r">
+              <a:defRPr sz="900">
                 <a:solidFill>
-                  <a:srgbClr val="222222"/>
+                  <a:srgbClr val="9AA7B6"/>
                 </a:solidFill>
-              </a:defRPr>
-            </a:pPr>
-            <a:r>
-              <a:t>• Préparer une courte présentation orale</a:t>
+                <a:latin typeface="Poppins"/>
+              </a:defRPr>
+            </a:pPr>
+            <a:r>
+              <a:rPr lang="fr-FR" sz="900">
+                <a:solidFill>
+                  <a:srgbClr val="9AA7B6"/>
+                </a:solidFill>
+                <a:latin typeface="Poppins"/>
+              </a:rPr>
+              <a:t>Université de Mostaganem — Dr. Madani BELACEL</a:t>
             </a:r>
           </a:p>
         </p:txBody>
@@ -4112,9 +4282,7 @@
   <p:cSld>
     <p:bg>
       <p:bgPr>
-        <a:solidFill>
-          <a:srgbClr val="1A5C33"/>
-        </a:solidFill>
+        <a:solidFill>val="006847"/&gt;</a:solidFill>
         <a:effectLst/>
       </p:bgPr>
     </p:bg>
@@ -4149,9 +4317,7 @@
           <a:p>
             <a:pPr algn="ctr">
               <a:defRPr sz="2800" b="1">
-                <a:solidFill>
-                  <a:srgbClr val="FFFFFF"/>
-                </a:solidFill>
+                <a:solidFill>val="FFFFFF"/&gt;</a:solidFill>
               </a:defRPr>
             </a:pPr>
             <a:r>
@@ -4184,25 +4350,64 @@
           <a:p>
             <a:pPr algn="ctr">
               <a:defRPr sz="1800" b="0">
+                <a:solidFill>val="DFE5EA"/&gt;</a:solidFill>
+              </a:defRPr>
+            </a:pPr>
+            <a:r>
+              <a:t>Dr. BELACEL Madani</a:t>
+            </a:r>
+            <a:br/>
+            <a:r>
+              <a:t>Maître de Conférences B</a:t>
+            </a:r>
+            <a:br/>
+            <a:r>
+              <a:t>Université de Mostaganem</a:t>
+            </a:r>
+            <a:br/>
+            <a:r>
+              <a:t>madani.belacel@univ-mosta.dz</a:t>
+            </a:r>
+          </a:p>
+        </p:txBody>
+      </p:sp>
+      <p:sp>
+        <p:nvSpPr>
+          <p:cNvPr id="990001" name="Pied de page FLE"/>
+          <p:cNvSpPr>
+            <a:spLocks noGrp="1"/>
+          </p:cNvSpPr>
+          <p:nvPr/>
+        </p:nvSpPr>
+        <p:spPr>
+          <a:xfrm>
+            <a:off x="2880360" y="457200"/>
+            <a:ext cx="4572000" cy="274320"/>
+          </a:xfrm>
+          <a:prstGeom prst="rect">
+            <a:avLst/>
+          </a:prstGeom>
+        </p:spPr>
+        <p:txBody>
+          <a:bodyPr anchor="b"/>
+          <a:lstStyle/>
+          <a:p>
+            <a:pPr algn="r">
+              <a:defRPr sz="900">
                 <a:solidFill>
-                  <a:srgbClr val="C5D9C7"/>
+                  <a:srgbClr val="9AA7B6"/>
                 </a:solidFill>
-              </a:defRPr>
-            </a:pPr>
-            <a:r>
-              <a:t>Dr. BELACEL Madani</a:t>
-            </a:r>
-            <a:br/>
-            <a:r>
-              <a:t>Maître de Conférences B</a:t>
-            </a:r>
-            <a:br/>
-            <a:r>
-              <a:t>Université de Mostaganem</a:t>
-            </a:r>
-            <a:br/>
-            <a:r>
-              <a:t>madani.belacel@univ-mosta.dz</a:t>
+                <a:latin typeface="Poppins"/>
+              </a:defRPr>
+            </a:pPr>
+            <a:r>
+              <a:rPr lang="fr-FR" sz="900">
+                <a:solidFill>
+                  <a:srgbClr val="9AA7B6"/>
+                </a:solidFill>
+                <a:latin typeface="Poppins"/>
+              </a:rPr>
+              <a:t>Université de Mostaganem — Dr. Madani BELACEL</a:t>
             </a:r>
           </a:p>
         </p:txBody>
@@ -4220,9 +4425,7 @@
   <p:cSld>
     <p:bg>
       <p:bgPr>
-        <a:solidFill>
-          <a:srgbClr val="FFFFFF"/>
-        </a:solidFill>
+        <a:solidFill>val="FFFFFF"/&gt;</a:solidFill>
         <a:effectLst/>
       </p:bgPr>
     </p:bg>
@@ -4257,9 +4460,7 @@
           <a:p>
             <a:pPr algn="l">
               <a:defRPr sz="2600" b="1">
-                <a:solidFill>
-                  <a:srgbClr val="1A5C33"/>
-                </a:solidFill>
+                <a:solidFill>val="006847"/&gt;</a:solidFill>
               </a:defRPr>
             </a:pPr>
             <a:r>
@@ -4295,9 +4496,7 @@
                 <a:spcPts val="600"/>
               </a:spcAft>
               <a:defRPr sz="1500">
-                <a:solidFill>
-                  <a:srgbClr val="222222"/>
-                </a:solidFill>
+                <a:solidFill>val="22344A"/&gt;</a:solidFill>
               </a:defRPr>
             </a:pPr>
             <a:r>
@@ -4318,9 +4517,7 @@
                 <a:spcPts val="600"/>
               </a:spcAft>
               <a:defRPr sz="1500">
-                <a:solidFill>
-                  <a:srgbClr val="222222"/>
-                </a:solidFill>
+                <a:solidFill>val="22344A"/&gt;</a:solidFill>
               </a:defRPr>
             </a:pPr>
             <a:r>
@@ -4341,9 +4538,7 @@
                 <a:spcPts val="600"/>
               </a:spcAft>
               <a:defRPr sz="1500">
-                <a:solidFill>
-                  <a:srgbClr val="222222"/>
-                </a:solidFill>
+                <a:solidFill>val="22344A"/&gt;</a:solidFill>
               </a:defRPr>
             </a:pPr>
             <a:r>
@@ -4360,13 +4555,52 @@
                 <a:spcPts val="600"/>
               </a:spcAft>
               <a:defRPr sz="1500">
+                <a:solidFill>val="22344A"/&gt;</a:solidFill>
+              </a:defRPr>
+            </a:pPr>
+            <a:r>
+              <a:t>• Mode d'évaluation :TD 40 % + Projet pédagogique TIC 30 % + Examen 30 %</a:t>
+            </a:r>
+          </a:p>
+        </p:txBody>
+      </p:sp>
+      <p:sp>
+        <p:nvSpPr>
+          <p:cNvPr id="990001" name="Pied de page FLE"/>
+          <p:cNvSpPr>
+            <a:spLocks noGrp="1"/>
+          </p:cNvSpPr>
+          <p:nvPr/>
+        </p:nvSpPr>
+        <p:spPr>
+          <a:xfrm>
+            <a:off x="2971800" y="182880"/>
+            <a:ext cx="4572000" cy="274320"/>
+          </a:xfrm>
+          <a:prstGeom prst="rect">
+            <a:avLst/>
+          </a:prstGeom>
+        </p:spPr>
+        <p:txBody>
+          <a:bodyPr anchor="b"/>
+          <a:lstStyle/>
+          <a:p>
+            <a:pPr algn="r">
+              <a:defRPr sz="900">
                 <a:solidFill>
-                  <a:srgbClr val="222222"/>
+                  <a:srgbClr val="9AA7B6"/>
                 </a:solidFill>
-              </a:defRPr>
-            </a:pPr>
-            <a:r>
-              <a:t>• Mode d'évaluation :TD 40 % + Projet pédagogique TIC 30 % + Examen 30 %</a:t>
+                <a:latin typeface="Poppins"/>
+              </a:defRPr>
+            </a:pPr>
+            <a:r>
+              <a:rPr lang="fr-FR" sz="900">
+                <a:solidFill>
+                  <a:srgbClr val="9AA7B6"/>
+                </a:solidFill>
+                <a:latin typeface="Poppins"/>
+              </a:rPr>
+              <a:t>Université de Mostaganem — Dr. Madani BELACEL</a:t>
             </a:r>
           </a:p>
         </p:txBody>
@@ -4384,9 +4618,7 @@
   <p:cSld>
     <p:bg>
       <p:bgPr>
-        <a:solidFill>
-          <a:srgbClr val="FFFFFF"/>
-        </a:solidFill>
+        <a:solidFill>val="FFFFFF"/&gt;</a:solidFill>
         <a:effectLst/>
       </p:bgPr>
     </p:bg>
@@ -4421,9 +4653,7 @@
           <a:p>
             <a:pPr algn="l">
               <a:defRPr sz="2600" b="1">
-                <a:solidFill>
-                  <a:srgbClr val="1A5C33"/>
-                </a:solidFill>
+                <a:solidFill>val="006847"/&gt;</a:solidFill>
               </a:defRPr>
             </a:pPr>
             <a:r>
@@ -4459,9 +4689,7 @@
                 <a:spcPts val="600"/>
               </a:spcAft>
               <a:defRPr sz="1600">
-                <a:solidFill>
-                  <a:srgbClr val="222222"/>
-                </a:solidFill>
+                <a:solidFill>val="22344A"/&gt;</a:solidFill>
               </a:defRPr>
             </a:pPr>
             <a:r>
@@ -4474,9 +4702,7 @@
                 <a:spcPts val="600"/>
               </a:spcAft>
               <a:defRPr sz="1600">
-                <a:solidFill>
-                  <a:srgbClr val="222222"/>
-                </a:solidFill>
+                <a:solidFill>val="22344A"/&gt;</a:solidFill>
               </a:defRPr>
             </a:pPr>
             <a:r>
@@ -4489,9 +4715,7 @@
                 <a:spcPts val="600"/>
               </a:spcAft>
               <a:defRPr sz="1600">
-                <a:solidFill>
-                  <a:srgbClr val="222222"/>
-                </a:solidFill>
+                <a:solidFill>val="22344A"/&gt;</a:solidFill>
               </a:defRPr>
             </a:pPr>
             <a:r>
@@ -4504,9 +4728,7 @@
                 <a:spcPts val="600"/>
               </a:spcAft>
               <a:defRPr sz="1600">
-                <a:solidFill>
-                  <a:srgbClr val="222222"/>
-                </a:solidFill>
+                <a:solidFill>val="22344A"/&gt;</a:solidFill>
               </a:defRPr>
             </a:pPr>
             <a:r>
@@ -4519,9 +4741,7 @@
                 <a:spcPts val="600"/>
               </a:spcAft>
               <a:defRPr sz="1600">
-                <a:solidFill>
-                  <a:srgbClr val="222222"/>
-                </a:solidFill>
+                <a:solidFill>val="22344A"/&gt;</a:solidFill>
               </a:defRPr>
             </a:pPr>
             <a:r>
@@ -4534,9 +4754,7 @@
                 <a:spcPts val="600"/>
               </a:spcAft>
               <a:defRPr sz="1600">
-                <a:solidFill>
-                  <a:srgbClr val="222222"/>
-                </a:solidFill>
+                <a:solidFill>val="22344A"/&gt;</a:solidFill>
               </a:defRPr>
             </a:pPr>
             <a:r>
@@ -4549,9 +4767,7 @@
                 <a:spcPts val="600"/>
               </a:spcAft>
               <a:defRPr sz="1600">
-                <a:solidFill>
-                  <a:srgbClr val="222222"/>
-                </a:solidFill>
+                <a:solidFill>val="22344A"/&gt;</a:solidFill>
               </a:defRPr>
             </a:pPr>
             <a:r>
@@ -4564,9 +4780,7 @@
                 <a:spcPts val="600"/>
               </a:spcAft>
               <a:defRPr sz="1600">
-                <a:solidFill>
-                  <a:srgbClr val="222222"/>
-                </a:solidFill>
+                <a:solidFill>val="22344A"/&gt;</a:solidFill>
               </a:defRPr>
             </a:pPr>
             <a:r>
@@ -4579,9 +4793,7 @@
                 <a:spcPts val="600"/>
               </a:spcAft>
               <a:defRPr sz="1600">
-                <a:solidFill>
-                  <a:srgbClr val="222222"/>
-                </a:solidFill>
+                <a:solidFill>val="22344A"/&gt;</a:solidFill>
               </a:defRPr>
             </a:pPr>
             <a:r>
@@ -4594,13 +4806,52 @@
                 <a:spcPts val="600"/>
               </a:spcAft>
               <a:defRPr sz="1600">
+                <a:solidFill>val="22344A"/&gt;</a:solidFill>
+              </a:defRPr>
+            </a:pPr>
+            <a:r>
+              <a:t>• Objectifs de l'enseignement</a:t>
+            </a:r>
+          </a:p>
+        </p:txBody>
+      </p:sp>
+      <p:sp>
+        <p:nvSpPr>
+          <p:cNvPr id="990001" name="Pied de page FLE"/>
+          <p:cNvSpPr>
+            <a:spLocks noGrp="1"/>
+          </p:cNvSpPr>
+          <p:nvPr/>
+        </p:nvSpPr>
+        <p:spPr>
+          <a:xfrm>
+            <a:off x="2971800" y="182880"/>
+            <a:ext cx="4572000" cy="274320"/>
+          </a:xfrm>
+          <a:prstGeom prst="rect">
+            <a:avLst/>
+          </a:prstGeom>
+        </p:spPr>
+        <p:txBody>
+          <a:bodyPr anchor="b"/>
+          <a:lstStyle/>
+          <a:p>
+            <a:pPr algn="r">
+              <a:defRPr sz="900">
                 <a:solidFill>
-                  <a:srgbClr val="222222"/>
+                  <a:srgbClr val="9AA7B6"/>
                 </a:solidFill>
-              </a:defRPr>
-            </a:pPr>
-            <a:r>
-              <a:t>• Objectifs de l'enseignement</a:t>
+                <a:latin typeface="Poppins"/>
+              </a:defRPr>
+            </a:pPr>
+            <a:r>
+              <a:rPr lang="fr-FR" sz="900">
+                <a:solidFill>
+                  <a:srgbClr val="9AA7B6"/>
+                </a:solidFill>
+                <a:latin typeface="Poppins"/>
+              </a:rPr>
+              <a:t>Université de Mostaganem — Dr. Madani BELACEL</a:t>
             </a:r>
           </a:p>
         </p:txBody>
@@ -4618,9 +4869,7 @@
   <p:cSld>
     <p:bg>
       <p:bgPr>
-        <a:solidFill>
-          <a:srgbClr val="FFFFFF"/>
-        </a:solidFill>
+        <a:solidFill>val="FFFFFF"/&gt;</a:solidFill>
         <a:effectLst/>
       </p:bgPr>
     </p:bg>
@@ -4645,9 +4894,7 @@
           <a:prstGeom prst="rect">
             <a:avLst/>
           </a:prstGeom>
-          <a:solidFill>
-            <a:srgbClr val="2C6E49"/>
-          </a:solidFill>
+          <a:solidFill>val="00875B"/&gt;</a:solidFill>
           <a:ln>
             <a:noFill/>
           </a:ln>
@@ -4698,9 +4945,7 @@
           <a:p>
             <a:pPr algn="l">
               <a:defRPr sz="2200" b="1">
-                <a:solidFill>
-                  <a:srgbClr val="1A5C33"/>
-                </a:solidFill>
+                <a:solidFill>val="006847"/&gt;</a:solidFill>
               </a:defRPr>
             </a:pPr>
             <a:r>
@@ -4736,9 +4981,7 @@
                 <a:spcPts val="600"/>
               </a:spcAft>
               <a:defRPr sz="1400">
-                <a:solidFill>
-                  <a:srgbClr val="222222"/>
-                </a:solidFill>
+                <a:solidFill>val="22344A"/&gt;</a:solidFill>
               </a:defRPr>
             </a:pPr>
             <a:r>
@@ -4751,13 +4994,52 @@
                 <a:spcPts val="600"/>
               </a:spcAft>
               <a:defRPr sz="1400">
+                <a:solidFill>val="22344A"/&gt;</a:solidFill>
+              </a:defRPr>
+            </a:pPr>
+            <a:r>
+              <a:t>• Compétences pré-requises :Notions de base en informatique (L1 validée)</a:t>
+            </a:r>
+          </a:p>
+        </p:txBody>
+      </p:sp>
+      <p:sp>
+        <p:nvSpPr>
+          <p:cNvPr id="990001" name="Pied de page FLE"/>
+          <p:cNvSpPr>
+            <a:spLocks noGrp="1"/>
+          </p:cNvSpPr>
+          <p:nvPr/>
+        </p:nvSpPr>
+        <p:spPr>
+          <a:xfrm>
+            <a:off x="-228600" y="6400800"/>
+            <a:ext cx="109728" cy="274320"/>
+          </a:xfrm>
+          <a:prstGeom prst="rect">
+            <a:avLst/>
+          </a:prstGeom>
+        </p:spPr>
+        <p:txBody>
+          <a:bodyPr anchor="b"/>
+          <a:lstStyle/>
+          <a:p>
+            <a:pPr algn="r">
+              <a:defRPr sz="900">
                 <a:solidFill>
-                  <a:srgbClr val="222222"/>
+                  <a:srgbClr val="9AA7B6"/>
                 </a:solidFill>
-              </a:defRPr>
-            </a:pPr>
-            <a:r>
-              <a:t>• Compétences pré-requises :Notions de base en informatique (L1 validée)</a:t>
+                <a:latin typeface="Poppins"/>
+              </a:defRPr>
+            </a:pPr>
+            <a:r>
+              <a:rPr lang="fr-FR" sz="900">
+                <a:solidFill>
+                  <a:srgbClr val="9AA7B6"/>
+                </a:solidFill>
+                <a:latin typeface="Poppins"/>
+              </a:rPr>
+              <a:t>Université de Mostaganem — Dr. Madani BELACEL</a:t>
             </a:r>
           </a:p>
         </p:txBody>
@@ -4775,9 +5057,7 @@
   <p:cSld>
     <p:bg>
       <p:bgPr>
-        <a:solidFill>
-          <a:srgbClr val="FFFFFF"/>
-        </a:solidFill>
+        <a:solidFill>val="FFFFFF"/&gt;</a:solidFill>
         <a:effectLst/>
       </p:bgPr>
     </p:bg>
@@ -4802,9 +5082,7 @@
           <a:prstGeom prst="rect">
             <a:avLst/>
           </a:prstGeom>
-          <a:solidFill>
-            <a:srgbClr val="2C6E49"/>
-          </a:solidFill>
+          <a:solidFill>val="00875B"/&gt;</a:solidFill>
           <a:ln>
             <a:noFill/>
           </a:ln>
@@ -4855,9 +5133,7 @@
           <a:p>
             <a:pPr algn="l">
               <a:defRPr sz="2200" b="1">
-                <a:solidFill>
-                  <a:srgbClr val="1A5C33"/>
-                </a:solidFill>
+                <a:solidFill>val="006847"/&gt;</a:solidFill>
               </a:defRPr>
             </a:pPr>
             <a:r>
@@ -4893,9 +5169,7 @@
                 <a:spcPts val="600"/>
               </a:spcAft>
               <a:defRPr sz="1400">
-                <a:solidFill>
-                  <a:srgbClr val="222222"/>
-                </a:solidFill>
+                <a:solidFill>val="22344A"/&gt;</a:solidFill>
               </a:defRPr>
             </a:pPr>
             <a:r>
@@ -4916,9 +5190,7 @@
                 <a:spcPts val="600"/>
               </a:spcAft>
               <a:defRPr sz="1400">
-                <a:solidFill>
-                  <a:srgbClr val="222222"/>
-                </a:solidFill>
+                <a:solidFill>val="22344A"/&gt;</a:solidFill>
               </a:defRPr>
             </a:pPr>
             <a:r>
@@ -4939,9 +5211,7 @@
                 <a:spcPts val="600"/>
               </a:spcAft>
               <a:defRPr sz="1400">
-                <a:solidFill>
-                  <a:srgbClr val="222222"/>
-                </a:solidFill>
+                <a:solidFill>val="22344A"/&gt;</a:solidFill>
               </a:defRPr>
             </a:pPr>
             <a:r>
@@ -4958,13 +5228,52 @@
                 <a:spcPts val="600"/>
               </a:spcAft>
               <a:defRPr sz="1400">
+                <a:solidFill>val="22344A"/&gt;</a:solidFill>
+              </a:defRPr>
+            </a:pPr>
+            <a:r>
+              <a:t>• Mode d'évaluation :TD 40 % + Projet pédagogique TIC 30 % + Examen 30 %</a:t>
+            </a:r>
+          </a:p>
+        </p:txBody>
+      </p:sp>
+      <p:sp>
+        <p:nvSpPr>
+          <p:cNvPr id="990001" name="Pied de page FLE"/>
+          <p:cNvSpPr>
+            <a:spLocks noGrp="1"/>
+          </p:cNvSpPr>
+          <p:nvPr/>
+        </p:nvSpPr>
+        <p:spPr>
+          <a:xfrm>
+            <a:off x="-228600" y="6400800"/>
+            <a:ext cx="109728" cy="274320"/>
+          </a:xfrm>
+          <a:prstGeom prst="rect">
+            <a:avLst/>
+          </a:prstGeom>
+        </p:spPr>
+        <p:txBody>
+          <a:bodyPr anchor="b"/>
+          <a:lstStyle/>
+          <a:p>
+            <a:pPr algn="r">
+              <a:defRPr sz="900">
                 <a:solidFill>
-                  <a:srgbClr val="222222"/>
+                  <a:srgbClr val="9AA7B6"/>
                 </a:solidFill>
-              </a:defRPr>
-            </a:pPr>
-            <a:r>
-              <a:t>• Mode d'évaluation :TD 40 % + Projet pédagogique TIC 30 % + Examen 30 %</a:t>
+                <a:latin typeface="Poppins"/>
+              </a:defRPr>
+            </a:pPr>
+            <a:r>
+              <a:rPr lang="fr-FR" sz="900">
+                <a:solidFill>
+                  <a:srgbClr val="9AA7B6"/>
+                </a:solidFill>
+                <a:latin typeface="Poppins"/>
+              </a:rPr>
+              <a:t>Université de Mostaganem — Dr. Madani BELACEL</a:t>
             </a:r>
           </a:p>
         </p:txBody>
@@ -4982,9 +5291,7 @@
   <p:cSld>
     <p:bg>
       <p:bgPr>
-        <a:solidFill>
-          <a:srgbClr val="FFFFFF"/>
-        </a:solidFill>
+        <a:solidFill>val="FFFFFF"/&gt;</a:solidFill>
         <a:effectLst/>
       </p:bgPr>
     </p:bg>
@@ -5009,9 +5316,7 @@
           <a:prstGeom prst="rect">
             <a:avLst/>
           </a:prstGeom>
-          <a:solidFill>
-            <a:srgbClr val="2C6E49"/>
-          </a:solidFill>
+          <a:solidFill>val="00875B"/&gt;</a:solidFill>
           <a:ln>
             <a:noFill/>
           </a:ln>
@@ -5062,9 +5367,7 @@
           <a:p>
             <a:pPr algn="l">
               <a:defRPr sz="2200" b="1">
-                <a:solidFill>
-                  <a:srgbClr val="1A5C33"/>
-                </a:solidFill>
+                <a:solidFill>val="006847"/&gt;</a:solidFill>
               </a:defRPr>
             </a:pPr>
             <a:r>
@@ -5100,9 +5403,7 @@
                 <a:spcPts val="600"/>
               </a:spcAft>
               <a:defRPr sz="1400">
-                <a:solidFill>
-                  <a:srgbClr val="222222"/>
-                </a:solidFill>
+                <a:solidFill>val="22344A"/&gt;</a:solidFill>
               </a:defRPr>
             </a:pPr>
             <a:r>
@@ -5115,9 +5416,7 @@
                 <a:spcPts val="600"/>
               </a:spcAft>
               <a:defRPr sz="1400">
-                <a:solidFill>
-                  <a:srgbClr val="222222"/>
-                </a:solidFill>
+                <a:solidFill>val="22344A"/&gt;</a:solidFill>
               </a:defRPr>
             </a:pPr>
             <a:r>
@@ -5130,9 +5429,7 @@
                 <a:spcPts val="600"/>
               </a:spcAft>
               <a:defRPr sz="1400">
-                <a:solidFill>
-                  <a:srgbClr val="222222"/>
-                </a:solidFill>
+                <a:solidFill>val="22344A"/&gt;</a:solidFill>
               </a:defRPr>
             </a:pPr>
             <a:r>
@@ -5145,9 +5442,7 @@
                 <a:spcPts val="600"/>
               </a:spcAft>
               <a:defRPr sz="1400">
-                <a:solidFill>
-                  <a:srgbClr val="222222"/>
-                </a:solidFill>
+                <a:solidFill>val="22344A"/&gt;</a:solidFill>
               </a:defRPr>
             </a:pPr>
             <a:r>
@@ -5160,9 +5455,7 @@
                 <a:spcPts val="600"/>
               </a:spcAft>
               <a:defRPr sz="1400">
-                <a:solidFill>
-                  <a:srgbClr val="222222"/>
-                </a:solidFill>
+                <a:solidFill>val="22344A"/&gt;</a:solidFill>
               </a:defRPr>
             </a:pPr>
             <a:r>
@@ -5175,9 +5468,7 @@
                 <a:spcPts val="600"/>
               </a:spcAft>
               <a:defRPr sz="1400">
-                <a:solidFill>
-                  <a:srgbClr val="222222"/>
-                </a:solidFill>
+                <a:solidFill>val="22344A"/&gt;</a:solidFill>
               </a:defRPr>
             </a:pPr>
             <a:r>
@@ -5190,9 +5481,7 @@
                 <a:spcPts val="600"/>
               </a:spcAft>
               <a:defRPr sz="1400">
-                <a:solidFill>
-                  <a:srgbClr val="222222"/>
-                </a:solidFill>
+                <a:solidFill>val="22344A"/&gt;</a:solidFill>
               </a:defRPr>
             </a:pPr>
             <a:r>
@@ -5205,13 +5494,52 @@
                 <a:spcPts val="600"/>
               </a:spcAft>
               <a:defRPr sz="1400">
+                <a:solidFill>val="22344A"/&gt;</a:solidFill>
+              </a:defRPr>
+            </a:pPr>
+            <a:r>
+              <a:t>• Conclusion et transition</a:t>
+            </a:r>
+          </a:p>
+        </p:txBody>
+      </p:sp>
+      <p:sp>
+        <p:nvSpPr>
+          <p:cNvPr id="990001" name="Pied de page FLE"/>
+          <p:cNvSpPr>
+            <a:spLocks noGrp="1"/>
+          </p:cNvSpPr>
+          <p:nvPr/>
+        </p:nvSpPr>
+        <p:spPr>
+          <a:xfrm>
+            <a:off x="-228600" y="6400800"/>
+            <a:ext cx="109728" cy="274320"/>
+          </a:xfrm>
+          <a:prstGeom prst="rect">
+            <a:avLst/>
+          </a:prstGeom>
+        </p:spPr>
+        <p:txBody>
+          <a:bodyPr anchor="b"/>
+          <a:lstStyle/>
+          <a:p>
+            <a:pPr algn="r">
+              <a:defRPr sz="900">
                 <a:solidFill>
-                  <a:srgbClr val="222222"/>
+                  <a:srgbClr val="9AA7B6"/>
                 </a:solidFill>
-              </a:defRPr>
-            </a:pPr>
-            <a:r>
-              <a:t>• Conclusion et transition</a:t>
+                <a:latin typeface="Poppins"/>
+              </a:defRPr>
+            </a:pPr>
+            <a:r>
+              <a:rPr lang="fr-FR" sz="900">
+                <a:solidFill>
+                  <a:srgbClr val="9AA7B6"/>
+                </a:solidFill>
+                <a:latin typeface="Poppins"/>
+              </a:rPr>
+              <a:t>Université de Mostaganem — Dr. Madani BELACEL</a:t>
             </a:r>
           </a:p>
         </p:txBody>
@@ -5229,9 +5557,7 @@
   <p:cSld>
     <p:bg>
       <p:bgPr>
-        <a:solidFill>
-          <a:srgbClr val="FFFFFF"/>
-        </a:solidFill>
+        <a:solidFill>val="FFFFFF"/&gt;</a:solidFill>
         <a:effectLst/>
       </p:bgPr>
     </p:bg>
@@ -5256,9 +5582,7 @@
           <a:prstGeom prst="rect">
             <a:avLst/>
           </a:prstGeom>
-          <a:solidFill>
-            <a:srgbClr val="2C6E49"/>
-          </a:solidFill>
+          <a:solidFill>val="00875B"/&gt;</a:solidFill>
           <a:ln>
             <a:noFill/>
           </a:ln>
@@ -5309,9 +5633,7 @@
           <a:p>
             <a:pPr algn="l">
               <a:defRPr sz="2200" b="1">
-                <a:solidFill>
-                  <a:srgbClr val="1A5C33"/>
-                </a:solidFill>
+                <a:solidFill>val="006847"/&gt;</a:solidFill>
               </a:defRPr>
             </a:pPr>
             <a:r>
@@ -5347,9 +5669,7 @@
                 <a:spcPts val="600"/>
               </a:spcAft>
               <a:defRPr sz="1400">
-                <a:solidFill>
-                  <a:srgbClr val="222222"/>
-                </a:solidFill>
+                <a:solidFill>val="22344A"/&gt;</a:solidFill>
               </a:defRPr>
             </a:pPr>
             <a:r>
@@ -5362,9 +5682,7 @@
                 <a:spcPts val="600"/>
               </a:spcAft>
               <a:defRPr sz="1400">
-                <a:solidFill>
-                  <a:srgbClr val="222222"/>
-                </a:solidFill>
+                <a:solidFill>val="22344A"/&gt;</a:solidFill>
               </a:defRPr>
             </a:pPr>
             <a:r>
@@ -5377,13 +5695,52 @@
                 <a:spcPts val="600"/>
               </a:spcAft>
               <a:defRPr sz="1400">
+                <a:solidFill>val="22344A"/&gt;</a:solidFill>
+              </a:defRPr>
+            </a:pPr>
+            <a:r>
+              <a:t>• Pour le futur enseignant :Les TIC ne sont pas seulement des outils personnels mais desinstruments pédagogiquesà intégrer dans sa pratique.</a:t>
+            </a:r>
+          </a:p>
+        </p:txBody>
+      </p:sp>
+      <p:sp>
+        <p:nvSpPr>
+          <p:cNvPr id="990001" name="Pied de page FLE"/>
+          <p:cNvSpPr>
+            <a:spLocks noGrp="1"/>
+          </p:cNvSpPr>
+          <p:nvPr/>
+        </p:nvSpPr>
+        <p:spPr>
+          <a:xfrm>
+            <a:off x="-228600" y="6400800"/>
+            <a:ext cx="109728" cy="274320"/>
+          </a:xfrm>
+          <a:prstGeom prst="rect">
+            <a:avLst/>
+          </a:prstGeom>
+        </p:spPr>
+        <p:txBody>
+          <a:bodyPr anchor="b"/>
+          <a:lstStyle/>
+          <a:p>
+            <a:pPr algn="r">
+              <a:defRPr sz="900">
                 <a:solidFill>
-                  <a:srgbClr val="222222"/>
+                  <a:srgbClr val="9AA7B6"/>
                 </a:solidFill>
-              </a:defRPr>
-            </a:pPr>
-            <a:r>
-              <a:t>• Pour le futur enseignant :Les TIC ne sont pas seulement des outils personnels mais desinstruments pédagogiquesà intégrer dans sa pratique.</a:t>
+                <a:latin typeface="Poppins"/>
+              </a:defRPr>
+            </a:pPr>
+            <a:r>
+              <a:rPr lang="fr-FR" sz="900">
+                <a:solidFill>
+                  <a:srgbClr val="9AA7B6"/>
+                </a:solidFill>
+                <a:latin typeface="Poppins"/>
+              </a:rPr>
+              <a:t>Université de Mostaganem — Dr. Madani BELACEL</a:t>
             </a:r>
           </a:p>
         </p:txBody>
@@ -5401,9 +5758,7 @@
   <p:cSld>
     <p:bg>
       <p:bgPr>
-        <a:solidFill>
-          <a:srgbClr val="FFFFFF"/>
-        </a:solidFill>
+        <a:solidFill>val="FFFFFF"/&gt;</a:solidFill>
         <a:effectLst/>
       </p:bgPr>
     </p:bg>
@@ -5428,9 +5783,7 @@
           <a:prstGeom prst="rect">
             <a:avLst/>
           </a:prstGeom>
-          <a:solidFill>
-            <a:srgbClr val="2C6E49"/>
-          </a:solidFill>
+          <a:solidFill>val="00875B"/&gt;</a:solidFill>
           <a:ln>
             <a:noFill/>
           </a:ln>
@@ -5481,9 +5834,7 @@
           <a:p>
             <a:pPr algn="l">
               <a:defRPr sz="2200" b="1">
-                <a:solidFill>
-                  <a:srgbClr val="1A5C33"/>
-                </a:solidFill>
+                <a:solidFill>val="006847"/&gt;</a:solidFill>
               </a:defRPr>
             </a:pPr>
             <a:r>
@@ -5519,9 +5870,7 @@
                 <a:spcPts val="600"/>
               </a:spcAft>
               <a:defRPr sz="1400">
-                <a:solidFill>
-                  <a:srgbClr val="222222"/>
-                </a:solidFill>
+                <a:solidFill>val="22344A"/&gt;</a:solidFill>
               </a:defRPr>
             </a:pPr>
             <a:r>
@@ -5546,25 +5895,64 @@
                 <a:spcPts val="600"/>
               </a:spcAft>
               <a:defRPr sz="1400">
+                <a:solidFill>val="22344A"/&gt;</a:solidFill>
+              </a:defRPr>
+            </a:pPr>
+            <a:r>
+              <a:t>• Domaines d'application :- Compréhension orale : podcasts, baladodiffusion</a:t>
+            </a:r>
+            <a:br/>
+            <a:r>
+              <a:t>- Production écrite : blogs, wikis, correction collaborative</a:t>
+            </a:r>
+            <a:br/>
+            <a:r>
+              <a:t>- Interaction : visioconférence avec classes partenaires</a:t>
+            </a:r>
+            <a:br/>
+            <a:r>
+              <a:t>- Grammaire/vocabulaire : exercices interactifs, quiz</a:t>
+            </a:r>
+          </a:p>
+        </p:txBody>
+      </p:sp>
+      <p:sp>
+        <p:nvSpPr>
+          <p:cNvPr id="990001" name="Pied de page FLE"/>
+          <p:cNvSpPr>
+            <a:spLocks noGrp="1"/>
+          </p:cNvSpPr>
+          <p:nvPr/>
+        </p:nvSpPr>
+        <p:spPr>
+          <a:xfrm>
+            <a:off x="-228600" y="6400800"/>
+            <a:ext cx="109728" cy="274320"/>
+          </a:xfrm>
+          <a:prstGeom prst="rect">
+            <a:avLst/>
+          </a:prstGeom>
+        </p:spPr>
+        <p:txBody>
+          <a:bodyPr anchor="b"/>
+          <a:lstStyle/>
+          <a:p>
+            <a:pPr algn="r">
+              <a:defRPr sz="900">
                 <a:solidFill>
-                  <a:srgbClr val="222222"/>
+                  <a:srgbClr val="9AA7B6"/>
                 </a:solidFill>
-              </a:defRPr>
-            </a:pPr>
-            <a:r>
-              <a:t>• Domaines d'application :- Compréhension orale : podcasts, baladodiffusion</a:t>
-            </a:r>
-            <a:br/>
-            <a:r>
-              <a:t>- Production écrite : blogs, wikis, correction collaborative</a:t>
-            </a:r>
-            <a:br/>
-            <a:r>
-              <a:t>- Interaction : visioconférence avec classes partenaires</a:t>
-            </a:r>
-            <a:br/>
-            <a:r>
-              <a:t>- Grammaire/vocabulaire : exercices interactifs, quiz</a:t>
+                <a:latin typeface="Poppins"/>
+              </a:defRPr>
+            </a:pPr>
+            <a:r>
+              <a:rPr lang="fr-FR" sz="900">
+                <a:solidFill>
+                  <a:srgbClr val="9AA7B6"/>
+                </a:solidFill>
+                <a:latin typeface="Poppins"/>
+              </a:rPr>
+              <a:t>Université de Mostaganem — Dr. Madani BELACEL</a:t>
             </a:r>
           </a:p>
         </p:txBody>
@@ -5582,9 +5970,7 @@
   <p:cSld>
     <p:bg>
       <p:bgPr>
-        <a:solidFill>
-          <a:srgbClr val="FFFFFF"/>
-        </a:solidFill>
+        <a:solidFill>val="FFFFFF"/&gt;</a:solidFill>
         <a:effectLst/>
       </p:bgPr>
     </p:bg>
@@ -5609,9 +5995,7 @@
           <a:prstGeom prst="rect">
             <a:avLst/>
           </a:prstGeom>
-          <a:solidFill>
-            <a:srgbClr val="2C6E49"/>
-          </a:solidFill>
+          <a:solidFill>val="00875B"/&gt;</a:solidFill>
           <a:ln>
             <a:noFill/>
           </a:ln>
@@ -5662,9 +6046,7 @@
           <a:p>
             <a:pPr algn="l">
               <a:defRPr sz="2200" b="1">
-                <a:solidFill>
-                  <a:srgbClr val="1A5C33"/>
-                </a:solidFill>
+                <a:solidFill>val="006847"/&gt;</a:solidFill>
               </a:defRPr>
             </a:pPr>
             <a:r>
@@ -5700,9 +6082,7 @@
                 <a:spcPts val="600"/>
               </a:spcAft>
               <a:defRPr sz="1400">
-                <a:solidFill>
-                  <a:srgbClr val="222222"/>
-                </a:solidFill>
+                <a:solidFill>val="22344A"/&gt;</a:solidFill>
               </a:defRPr>
             </a:pPr>
             <a:r>
@@ -5715,13 +6095,52 @@
                 <a:spcPts val="600"/>
               </a:spcAft>
               <a:defRPr sz="1400">
+                <a:solidFill>val="22344A"/&gt;</a:solidFill>
+              </a:defRPr>
+            </a:pPr>
+            <a:r>
+              <a:t>• Objectif pour l'enseignant :viser au moins les niveauxModificationetRedéfinition.</a:t>
+            </a:r>
+          </a:p>
+        </p:txBody>
+      </p:sp>
+      <p:sp>
+        <p:nvSpPr>
+          <p:cNvPr id="990001" name="Pied de page FLE"/>
+          <p:cNvSpPr>
+            <a:spLocks noGrp="1"/>
+          </p:cNvSpPr>
+          <p:nvPr/>
+        </p:nvSpPr>
+        <p:spPr>
+          <a:xfrm>
+            <a:off x="-228600" y="6400800"/>
+            <a:ext cx="109728" cy="274320"/>
+          </a:xfrm>
+          <a:prstGeom prst="rect">
+            <a:avLst/>
+          </a:prstGeom>
+        </p:spPr>
+        <p:txBody>
+          <a:bodyPr anchor="b"/>
+          <a:lstStyle/>
+          <a:p>
+            <a:pPr algn="r">
+              <a:defRPr sz="900">
                 <a:solidFill>
-                  <a:srgbClr val="222222"/>
+                  <a:srgbClr val="9AA7B6"/>
                 </a:solidFill>
-              </a:defRPr>
-            </a:pPr>
-            <a:r>
-              <a:t>• Objectif pour l'enseignant :viser au moins les niveauxModificationetRedéfinition.</a:t>
+                <a:latin typeface="Poppins"/>
+              </a:defRPr>
+            </a:pPr>
+            <a:r>
+              <a:rPr lang="fr-FR" sz="900">
+                <a:solidFill>
+                  <a:srgbClr val="9AA7B6"/>
+                </a:solidFill>
+                <a:latin typeface="Poppins"/>
+              </a:rPr>
+              <a:t>Université de Mostaganem — Dr. Madani BELACEL</a:t>
             </a:r>
           </a:p>
         </p:txBody>
@@ -5777,7 +6196,7 @@
     </a:clrScheme>
     <a:fontScheme name="Office">
       <a:majorFont>
-        <a:latin typeface="Calibri"/>
+        <a:latin typeface="Poppins"/>
         <a:ea typeface=""/>
         <a:cs typeface=""/>
         <a:font script="Jpan" typeface="ＭＳ Ｐゴシック"/>
@@ -5812,7 +6231,7 @@
         <a:font script="Geor" typeface="Sylfaen"/>
       </a:majorFont>
       <a:minorFont>
-        <a:latin typeface="Calibri"/>
+        <a:latin typeface="Poppins"/>
         <a:ea typeface=""/>
         <a:cs typeface=""/>
         <a:font script="Jpan" typeface="ＭＳ Ｐゴシック"/>
